--- a/dist/초6/수학/입체와측정/초6_수학_입체와측정_01_각기둥과각뿔_학생용.pptx
+++ b/dist/초6/수학/입체와측정/초6_수학_입체와측정_01_각기둥과각뿔_학생용.pptx
@@ -121,13 +121,13 @@
   <p:extLst>
     <p:ext uri="{521415D9-36F7-43E2-AB2F-B90AF26B5E84}">
       <p14:sectionLst xmlns:p14="http://schemas.microsoft.com/office/powerpoint/2010/main">
-        <p14:section name="도입" id="{52484bce-6621-cf73-2d24-6ae40dcf881b}">
+        <p14:section name="도입" id="{a413d0df-b459-c789-64c2-2f5dca46f7bb}">
           <p14:sldIdLst>
             <p14:sldId id="256"/>
             <p14:sldId id="257"/>
           </p14:sldIdLst>
         </p14:section>
-        <p14:section name="개념" id="{d4460d65-7fa8-318f-6f3d-711e54e80fd7}">
+        <p14:section name="개념" id="{03e95c56-ecf5-be9c-611a-d07e6307a31f}">
           <p14:sldIdLst>
             <p14:sldId id="258"/>
             <p14:sldId id="259"/>
@@ -136,7 +136,7 @@
             <p14:sldId id="265"/>
           </p14:sldIdLst>
         </p14:section>
-        <p14:section name="연습" id="{73710e0e-93d4-c4ae-5b28-a429e0ce810f}">
+        <p14:section name="연습" id="{c6cef294-a45c-933d-fc81-6dde271c8b8c}">
           <p14:sldIdLst>
             <p14:sldId id="261"/>
             <p14:sldId id="263"/>
@@ -144,30 +144,30 @@
             <p14:sldId id="266"/>
           </p14:sldIdLst>
         </p14:section>
-        <p14:section name="개념" id="{a19cf43f-a6aa-53f4-0761-73455bebc0b1}">
+        <p14:section name="개념" id="{cb8f84a4-39e0-260d-129b-4ba04e7013d3}">
           <p14:sldIdLst/>
         </p14:section>
-        <p14:section name="연습" id="{063c345a-a27d-9f83-ca50-abe463e84530}">
+        <p14:section name="연습" id="{5fed1f63-02bd-10c7-418b-f7b4e05ddd2f}">
           <p14:sldIdLst/>
         </p14:section>
-        <p14:section name="개념" id="{3efa49d8-1c9b-3ca0-5acf-c86759e073c3}">
+        <p14:section name="개념" id="{835e46db-9000-d394-7a12-0aae6eaf8991}">
           <p14:sldIdLst/>
         </p14:section>
-        <p14:section name="연습" id="{91ba2dde-9acc-faf6-24ed-01de524585ed}">
+        <p14:section name="연습" id="{635e1bac-ef91-4a09-253b-86fc6a906ba9}">
           <p14:sldIdLst/>
         </p14:section>
-        <p14:section name="확인" id="{b39d96b4-821b-72bb-d369-ccc5b02789d5}">
+        <p14:section name="확인" id="{96ecbb4b-4cb3-e642-8dbd-ca9e8d37a001}">
           <p14:sldIdLst>
             <p14:sldId id="267"/>
             <p14:sldId id="268"/>
           </p14:sldIdLst>
         </p14:section>
-        <p14:section name="정리" id="{fc318c89-0426-0961-2db6-27204e2dab1e}">
+        <p14:section name="정리" id="{9572a92a-0903-6697-ad70-e30e5c1aec64}">
           <p14:sldIdLst>
             <p14:sldId id="269"/>
           </p14:sldIdLst>
         </p14:section>
-        <p14:section name="보충" id="{d9bf1c40-4187-82b5-3b5e-ed178a5f7fa8}">
+        <p14:section name="보충" id="{1ae9c765-bb6e-f769-7d55-659abbc63a01}">
           <p14:sldIdLst>
             <p14:sldId id="270"/>
           </p14:sldIdLst>
@@ -3460,7 +3460,7 @@
       </p:sp>
       <p:sp>
         <p:nvSpPr>
-          <p:cNvPr id="3" name="S10-mark175"/>
+          <p:cNvPr id="3" name="S10-mark153"/>
           <p:cNvSpPr/>
           <p:nvPr/>
         </p:nvSpPr>
@@ -3501,7 +3501,7 @@
       </p:sp>
       <p:sp>
         <p:nvSpPr>
-          <p:cNvPr id="4" name="S10-mark176"/>
+          <p:cNvPr id="4" name="S10-mark154"/>
           <p:cNvSpPr/>
           <p:nvPr/>
         </p:nvSpPr>
@@ -3542,7 +3542,7 @@
       </p:sp>
       <p:sp>
         <p:nvSpPr>
-          <p:cNvPr id="5" name="S10-mark177"/>
+          <p:cNvPr id="5" name="S10-mark155"/>
           <p:cNvSpPr/>
           <p:nvPr/>
         </p:nvSpPr>
@@ -3583,7 +3583,7 @@
       </p:sp>
       <p:sp>
         <p:nvSpPr>
-          <p:cNvPr id="6" name="S10-mark178"/>
+          <p:cNvPr id="6" name="S10-mark156"/>
           <p:cNvSpPr/>
           <p:nvPr/>
         </p:nvSpPr>
@@ -3621,7 +3621,7 @@
       </p:sp>
       <p:sp>
         <p:nvSpPr>
-          <p:cNvPr id="7" name="S10-mark179"/>
+          <p:cNvPr id="7" name="S10-mark157"/>
           <p:cNvSpPr/>
           <p:nvPr/>
         </p:nvSpPr>
@@ -3659,7 +3659,7 @@
       </p:sp>
       <p:sp>
         <p:nvSpPr>
-          <p:cNvPr id="8" name="S10-mark180"/>
+          <p:cNvPr id="8" name="S10-mark158"/>
           <p:cNvSpPr/>
           <p:nvPr/>
         </p:nvSpPr>
@@ -3682,7 +3682,7 @@
       </p:sp>
       <p:sp>
         <p:nvSpPr>
-          <p:cNvPr id="9" name="S10-mark181"/>
+          <p:cNvPr id="9" name="S10-mark159"/>
           <p:cNvSpPr/>
           <p:nvPr/>
         </p:nvSpPr>
@@ -3705,7 +3705,7 @@
       </p:sp>
       <p:sp>
         <p:nvSpPr>
-          <p:cNvPr id="10" name="S10-mark182"/>
+          <p:cNvPr id="10" name="S10-mark160"/>
           <p:cNvSpPr/>
           <p:nvPr/>
         </p:nvSpPr>
@@ -3728,7 +3728,7 @@
       </p:sp>
       <p:sp>
         <p:nvSpPr>
-          <p:cNvPr id="11" name="S10-mark183"/>
+          <p:cNvPr id="11" name="S10-mark161"/>
           <p:cNvSpPr/>
           <p:nvPr/>
         </p:nvSpPr>
@@ -3751,7 +3751,7 @@
       </p:sp>
       <p:sp>
         <p:nvSpPr>
-          <p:cNvPr id="12" name="S10-mark184"/>
+          <p:cNvPr id="12" name="S10-mark162"/>
           <p:cNvSpPr/>
           <p:nvPr/>
         </p:nvSpPr>
@@ -3774,7 +3774,7 @@
       </p:sp>
       <p:sp>
         <p:nvSpPr>
-          <p:cNvPr id="13" name="S10-mark185"/>
+          <p:cNvPr id="13" name="S10-mark163"/>
           <p:cNvSpPr/>
           <p:nvPr/>
         </p:nvSpPr>
@@ -3797,7 +3797,7 @@
       </p:sp>
       <p:sp>
         <p:nvSpPr>
-          <p:cNvPr id="14" name="S10-mark186"/>
+          <p:cNvPr id="14" name="S10-mark164"/>
           <p:cNvSpPr/>
           <p:nvPr/>
         </p:nvSpPr>
@@ -3820,7 +3820,7 @@
       </p:sp>
       <p:sp>
         <p:nvSpPr>
-          <p:cNvPr id="15" name="S10-mark187"/>
+          <p:cNvPr id="15" name="S10-mark165"/>
           <p:cNvSpPr/>
           <p:nvPr/>
         </p:nvSpPr>
@@ -3843,7 +3843,7 @@
       </p:sp>
       <p:sp>
         <p:nvSpPr>
-          <p:cNvPr id="16" name="S10-mark188"/>
+          <p:cNvPr id="16" name="S10-mark166"/>
           <p:cNvSpPr/>
           <p:nvPr/>
         </p:nvSpPr>
@@ -3866,7 +3866,7 @@
       </p:sp>
       <p:sp>
         <p:nvSpPr>
-          <p:cNvPr id="17" name="S10-mark189"/>
+          <p:cNvPr id="17" name="S10-mark167"/>
           <p:cNvSpPr/>
           <p:nvPr/>
         </p:nvSpPr>
@@ -3889,7 +3889,7 @@
       </p:sp>
       <p:sp>
         <p:nvSpPr>
-          <p:cNvPr id="18" name="S10-mark190"/>
+          <p:cNvPr id="18" name="S10-mark168"/>
           <p:cNvSpPr/>
           <p:nvPr/>
         </p:nvSpPr>
@@ -3912,7 +3912,7 @@
       </p:sp>
       <p:sp>
         <p:nvSpPr>
-          <p:cNvPr id="19" name="S10-mark191"/>
+          <p:cNvPr id="19" name="S10-mark169"/>
           <p:cNvSpPr/>
           <p:nvPr/>
         </p:nvSpPr>
@@ -3935,7 +3935,7 @@
       </p:sp>
       <p:sp>
         <p:nvSpPr>
-          <p:cNvPr id="20" name="S10-mark192"/>
+          <p:cNvPr id="20" name="S10-mark170"/>
           <p:cNvSpPr/>
           <p:nvPr/>
         </p:nvSpPr>
@@ -3958,7 +3958,7 @@
       </p:sp>
       <p:sp>
         <p:nvSpPr>
-          <p:cNvPr id="21" name="S10-mark193"/>
+          <p:cNvPr id="21" name="S10-mark171"/>
           <p:cNvSpPr/>
           <p:nvPr/>
         </p:nvSpPr>
@@ -3981,7 +3981,7 @@
       </p:sp>
       <p:sp>
         <p:nvSpPr>
-          <p:cNvPr id="22" name="S10-mark194"/>
+          <p:cNvPr id="22" name="S10-mark172"/>
           <p:cNvSpPr/>
           <p:nvPr/>
         </p:nvSpPr>
@@ -4004,7 +4004,7 @@
       </p:sp>
       <p:sp>
         <p:nvSpPr>
-          <p:cNvPr id="23" name="S10-mark195"/>
+          <p:cNvPr id="23" name="S10-mark173"/>
           <p:cNvSpPr/>
           <p:nvPr/>
         </p:nvSpPr>
@@ -4027,7 +4027,7 @@
       </p:sp>
       <p:sp>
         <p:nvSpPr>
-          <p:cNvPr id="24" name="S10-mark196"/>
+          <p:cNvPr id="24" name="S10-mark174"/>
           <p:cNvSpPr/>
           <p:nvPr/>
         </p:nvSpPr>
@@ -4050,7 +4050,7 @@
       </p:sp>
       <p:sp>
         <p:nvSpPr>
-          <p:cNvPr id="25" name="S10-mark197"/>
+          <p:cNvPr id="25" name="S10-mark175"/>
           <p:cNvSpPr/>
           <p:nvPr/>
         </p:nvSpPr>
@@ -4073,7 +4073,7 @@
       </p:sp>
       <p:sp>
         <p:nvSpPr>
-          <p:cNvPr id="26" name="S10-mark198"/>
+          <p:cNvPr id="26" name="S10-mark176"/>
           <p:cNvSpPr/>
           <p:nvPr/>
         </p:nvSpPr>
@@ -4096,7 +4096,7 @@
       </p:sp>
       <p:sp>
         <p:nvSpPr>
-          <p:cNvPr id="27" name="S10-mark199"/>
+          <p:cNvPr id="27" name="S10-mark177"/>
           <p:cNvSpPr/>
           <p:nvPr/>
         </p:nvSpPr>
@@ -4119,7 +4119,7 @@
       </p:sp>
       <p:sp>
         <p:nvSpPr>
-          <p:cNvPr id="28" name="S10-mark200"/>
+          <p:cNvPr id="28" name="S10-mark178"/>
           <p:cNvSpPr/>
           <p:nvPr/>
         </p:nvSpPr>
@@ -4142,7 +4142,7 @@
       </p:sp>
       <p:sp>
         <p:nvSpPr>
-          <p:cNvPr id="29" name="S10-mark201"/>
+          <p:cNvPr id="29" name="S10-mark179"/>
           <p:cNvSpPr/>
           <p:nvPr/>
         </p:nvSpPr>
@@ -4165,7 +4165,7 @@
       </p:sp>
       <p:sp>
         <p:nvSpPr>
-          <p:cNvPr id="30" name="S10-mark202"/>
+          <p:cNvPr id="30" name="S10-mark180"/>
           <p:cNvSpPr/>
           <p:nvPr/>
         </p:nvSpPr>
@@ -4188,7 +4188,7 @@
       </p:sp>
       <p:sp>
         <p:nvSpPr>
-          <p:cNvPr id="31" name="S10-mark203"/>
+          <p:cNvPr id="31" name="S10-mark181"/>
           <p:cNvSpPr/>
           <p:nvPr/>
         </p:nvSpPr>
@@ -4211,7 +4211,7 @@
       </p:sp>
       <p:sp>
         <p:nvSpPr>
-          <p:cNvPr id="32" name="S10-mark204"/>
+          <p:cNvPr id="32" name="S10-mark182"/>
           <p:cNvSpPr/>
           <p:nvPr/>
         </p:nvSpPr>
@@ -4234,7 +4234,7 @@
       </p:sp>
       <p:sp>
         <p:nvSpPr>
-          <p:cNvPr id="33" name="S10-mark205"/>
+          <p:cNvPr id="33" name="S10-mark183"/>
           <p:cNvSpPr/>
           <p:nvPr/>
         </p:nvSpPr>
@@ -4257,7 +4257,7 @@
       </p:sp>
       <p:sp>
         <p:nvSpPr>
-          <p:cNvPr id="34" name="S10-figure206" descr="모눈 위 삼각기둥의 전개도: 가로 3 cm, 4 cm, 5 cm, 세로 2 cm인 직사각형 옆면 3개와 그 위아래에 세 변이 3 cm, 4 cm, 5 cm인 삼각형 밑면 2개. 접으면 만나는 두 선분을 파랗게 표시"/>
+          <p:cNvPr id="34" name="S10-figure184" descr="모눈 위 삼각기둥의 전개도: 가로 3 cm, 4 cm, 5 cm, 세로 2 cm인 직사각형 옆면 3개와 그 위아래에 세 변이 3 cm, 4 cm, 5 cm인 삼각형 밑면 2개. 접으면 만나는 두 선분을 파랗게 표시"/>
           <p:cNvSpPr/>
           <p:nvPr/>
         </p:nvSpPr>
@@ -4301,7 +4301,7 @@
       </p:sp>
       <p:sp>
         <p:nvSpPr>
-          <p:cNvPr id="35" name="S10-mark207"/>
+          <p:cNvPr id="35" name="S10-mark185"/>
           <p:cNvSpPr/>
           <p:nvPr/>
         </p:nvSpPr>
@@ -4345,7 +4345,7 @@
       </p:sp>
       <p:sp>
         <p:nvSpPr>
-          <p:cNvPr id="36" name="S10-mark208"/>
+          <p:cNvPr id="36" name="S10-mark186"/>
           <p:cNvSpPr/>
           <p:nvPr/>
         </p:nvSpPr>
@@ -4389,7 +4389,7 @@
       </p:sp>
       <p:sp>
         <p:nvSpPr>
-          <p:cNvPr id="37" name="S10-mark209"/>
+          <p:cNvPr id="37" name="S10-mark187"/>
           <p:cNvSpPr/>
           <p:nvPr/>
         </p:nvSpPr>
@@ -4430,7 +4430,7 @@
       </p:sp>
       <p:sp>
         <p:nvSpPr>
-          <p:cNvPr id="38" name="S10-mark210"/>
+          <p:cNvPr id="38" name="S10-mark188"/>
           <p:cNvSpPr/>
           <p:nvPr/>
         </p:nvSpPr>
@@ -4471,7 +4471,7 @@
       </p:sp>
       <p:sp>
         <p:nvSpPr>
-          <p:cNvPr id="39" name="S10-mark211"/>
+          <p:cNvPr id="39" name="S10-mark189"/>
           <p:cNvSpPr/>
           <p:nvPr/>
         </p:nvSpPr>
@@ -4494,7 +4494,7 @@
       </p:sp>
       <p:sp>
         <p:nvSpPr>
-          <p:cNvPr id="40" name="S10-mark212"/>
+          <p:cNvPr id="40" name="S10-mark190"/>
           <p:cNvSpPr/>
           <p:nvPr/>
         </p:nvSpPr>
@@ -4517,7 +4517,7 @@
       </p:sp>
       <p:sp>
         <p:nvSpPr>
-          <p:cNvPr id="41" name="S10-label214"/>
+          <p:cNvPr id="41" name="S10-label192"/>
           <p:cNvSpPr txBox="1"/>
           <p:nvPr/>
         </p:nvSpPr>
@@ -4548,7 +4548,7 @@
                 <a:ea typeface="맑은 고딕" pitchFamily="34" charset="-122"/>
                 <a:cs typeface="맑은 고딕" pitchFamily="34" charset="-120"/>
               </a:rPr>
-              <a:t>3 cm</a:t>
+              <a:t>3 cm</a:t>
             </a:r>
             <a:endParaRPr lang="ko-KR" sz="2200" dirty="0"/>
           </a:p>
@@ -4556,13 +4556,13 @@
       </p:sp>
       <p:sp>
         <p:nvSpPr>
-          <p:cNvPr id="42" name="S10-label216"/>
+          <p:cNvPr id="42" name="S10-label194"/>
           <p:cNvSpPr txBox="1"/>
           <p:nvPr/>
         </p:nvSpPr>
         <p:spPr>
           <a:xfrm>
-            <a:off x="490064" y="3597275"/>
+            <a:off x="445360" y="3597275"/>
             <a:ext cx="763524" cy="349250"/>
           </a:xfrm>
           <a:prstGeom prst="rect">
@@ -4587,7 +4587,7 @@
                 <a:ea typeface="맑은 고딕" pitchFamily="34" charset="-122"/>
                 <a:cs typeface="맑은 고딕" pitchFamily="34" charset="-120"/>
               </a:rPr>
-              <a:t>2 cm</a:t>
+              <a:t>2 cm</a:t>
             </a:r>
             <a:endParaRPr lang="ko-KR" sz="2200" dirty="0"/>
           </a:p>
@@ -4595,13 +4595,13 @@
       </p:sp>
       <p:sp>
         <p:nvSpPr>
-          <p:cNvPr id="43" name="S10-label218"/>
+          <p:cNvPr id="43" name="S10-label196"/>
           <p:cNvSpPr txBox="1"/>
           <p:nvPr/>
         </p:nvSpPr>
         <p:spPr>
           <a:xfrm>
-            <a:off x="2743026" y="4222213"/>
+            <a:off x="4423677" y="4222213"/>
             <a:ext cx="763524" cy="349250"/>
           </a:xfrm>
           <a:prstGeom prst="rect">
@@ -4626,7 +4626,7 @@
                 <a:ea typeface="맑은 고딕" pitchFamily="34" charset="-122"/>
                 <a:cs typeface="맑은 고딕" pitchFamily="34" charset="-120"/>
               </a:rPr>
-              <a:t>4 cm</a:t>
+              <a:t>5 cm</a:t>
             </a:r>
             <a:endParaRPr lang="ko-KR" sz="2200" dirty="0"/>
           </a:p>
@@ -4634,13 +4634,13 @@
       </p:sp>
       <p:sp>
         <p:nvSpPr>
-          <p:cNvPr id="44" name="S10-label220"/>
+          <p:cNvPr id="44" name="S10-label198"/>
           <p:cNvSpPr txBox="1"/>
           <p:nvPr/>
         </p:nvSpPr>
         <p:spPr>
           <a:xfrm>
-            <a:off x="4423677" y="4222213"/>
+            <a:off x="2743026" y="3597275"/>
             <a:ext cx="763524" cy="349250"/>
           </a:xfrm>
           <a:prstGeom prst="rect">
@@ -4665,7 +4665,7 @@
                 <a:ea typeface="맑은 고딕" pitchFamily="34" charset="-122"/>
                 <a:cs typeface="맑은 고딕" pitchFamily="34" charset="-120"/>
               </a:rPr>
-              <a:t>5 cm</a:t>
+              <a:t>4 cm</a:t>
             </a:r>
             <a:endParaRPr lang="ko-KR" sz="2200" dirty="0"/>
           </a:p>
@@ -4673,7 +4673,7 @@
       </p:sp>
       <p:sp>
         <p:nvSpPr>
-          <p:cNvPr id="45" name="S10-card221"/>
+          <p:cNvPr id="45" name="S10-card199"/>
           <p:cNvSpPr/>
           <p:nvPr/>
         </p:nvSpPr>
@@ -4700,7 +4700,7 @@
       </p:sp>
       <p:sp>
         <p:nvSpPr>
-          <p:cNvPr id="46" name="S10-cardtext222"/>
+          <p:cNvPr id="46" name="S10-cardtext200"/>
           <p:cNvSpPr txBox="1"/>
           <p:nvPr/>
         </p:nvSpPr>
@@ -4762,7 +4762,7 @@
       </p:sp>
       <p:sp>
         <p:nvSpPr>
-          <p:cNvPr id="47" name="S10-card223"/>
+          <p:cNvPr id="47" name="S10-card201"/>
           <p:cNvSpPr/>
           <p:nvPr/>
         </p:nvSpPr>
@@ -4789,7 +4789,7 @@
       </p:sp>
       <p:sp>
         <p:nvSpPr>
-          <p:cNvPr id="48" name="S10-cardtext224"/>
+          <p:cNvPr id="48" name="S10-cardtext202"/>
           <p:cNvSpPr txBox="1"/>
           <p:nvPr/>
         </p:nvSpPr>
@@ -4863,7 +4863,7 @@
                 <a:ea typeface="맑은 고딕" pitchFamily="34" charset="-122"/>
                 <a:cs typeface="맑은 고딕" pitchFamily="34" charset="-120"/>
               </a:rPr>
-              <a:t>(높이 2 cm)</a:t>
+              <a:t>(높이 2 cm)</a:t>
             </a:r>
             <a:endParaRPr lang="ko-KR" sz="2800" dirty="0"/>
           </a:p>
@@ -4871,7 +4871,7 @@
       </p:sp>
       <p:sp>
         <p:nvSpPr>
-          <p:cNvPr id="49" name="S10-card225"/>
+          <p:cNvPr id="49" name="S10-card203"/>
           <p:cNvSpPr/>
           <p:nvPr/>
         </p:nvSpPr>
@@ -4898,7 +4898,7 @@
       </p:sp>
       <p:sp>
         <p:nvSpPr>
-          <p:cNvPr id="50" name="S10-cardtext226"/>
+          <p:cNvPr id="50" name="S10-cardtext204"/>
           <p:cNvSpPr txBox="1"/>
           <p:nvPr/>
         </p:nvSpPr>
@@ -5094,7 +5094,7 @@
       </p:sp>
       <p:sp>
         <p:nvSpPr>
-          <p:cNvPr id="3" name="S11-card227"/>
+          <p:cNvPr id="3" name="S11-card205"/>
           <p:cNvSpPr/>
           <p:nvPr/>
         </p:nvSpPr>
@@ -5121,7 +5121,7 @@
       </p:sp>
       <p:sp>
         <p:nvSpPr>
-          <p:cNvPr id="4" name="S11-cardtext228"/>
+          <p:cNvPr id="4" name="S11-cardtext206"/>
           <p:cNvSpPr txBox="1"/>
           <p:nvPr/>
         </p:nvSpPr>
@@ -5163,7 +5163,7 @@
       </p:sp>
       <p:sp>
         <p:nvSpPr>
-          <p:cNvPr id="5" name="S11-chip229"/>
+          <p:cNvPr id="5" name="S11-chip207"/>
           <p:cNvSpPr txBox="1"/>
           <p:nvPr/>
         </p:nvSpPr>
@@ -5210,7 +5210,7 @@
       </p:sp>
       <p:sp>
         <p:nvSpPr>
-          <p:cNvPr id="6" name="S11-figure230" descr="가: 밑면 두 개가 가운데 옆면의 위와 아래에 붙은 전개도"/>
+          <p:cNvPr id="6" name="S11-figure208" descr="가: 밑면 두 개가 가운데 옆면의 위와 아래에 붙은 전개도"/>
           <p:cNvSpPr/>
           <p:nvPr/>
         </p:nvSpPr>
@@ -5256,7 +5256,7 @@
       </p:sp>
       <p:sp>
         <p:nvSpPr>
-          <p:cNvPr id="7" name="S11-mark231"/>
+          <p:cNvPr id="7" name="S11-mark209"/>
           <p:cNvSpPr/>
           <p:nvPr/>
         </p:nvSpPr>
@@ -5302,7 +5302,7 @@
       </p:sp>
       <p:sp>
         <p:nvSpPr>
-          <p:cNvPr id="8" name="S11-mark232"/>
+          <p:cNvPr id="8" name="S11-mark210"/>
           <p:cNvSpPr/>
           <p:nvPr/>
         </p:nvSpPr>
@@ -5348,7 +5348,7 @@
       </p:sp>
       <p:sp>
         <p:nvSpPr>
-          <p:cNvPr id="9" name="S11-mark233"/>
+          <p:cNvPr id="9" name="S11-mark211"/>
           <p:cNvSpPr/>
           <p:nvPr/>
         </p:nvSpPr>
@@ -5391,7 +5391,7 @@
       </p:sp>
       <p:sp>
         <p:nvSpPr>
-          <p:cNvPr id="10" name="S11-mark234"/>
+          <p:cNvPr id="10" name="S11-mark212"/>
           <p:cNvSpPr/>
           <p:nvPr/>
         </p:nvSpPr>
@@ -5434,7 +5434,7 @@
       </p:sp>
       <p:sp>
         <p:nvSpPr>
-          <p:cNvPr id="11" name="S11-chip235"/>
+          <p:cNvPr id="11" name="S11-chip213"/>
           <p:cNvSpPr txBox="1"/>
           <p:nvPr/>
         </p:nvSpPr>
@@ -5481,7 +5481,7 @@
       </p:sp>
       <p:sp>
         <p:nvSpPr>
-          <p:cNvPr id="12" name="S11-figure236" descr="나: 밑면 두 개가 모두 옆면들의 위쪽에 붙은 그림"/>
+          <p:cNvPr id="12" name="S11-figure214" descr="나: 밑면 두 개가 모두 옆면들의 위쪽에 붙은 그림"/>
           <p:cNvSpPr/>
           <p:nvPr/>
         </p:nvSpPr>
@@ -5527,7 +5527,7 @@
       </p:sp>
       <p:sp>
         <p:nvSpPr>
-          <p:cNvPr id="13" name="S11-mark237"/>
+          <p:cNvPr id="13" name="S11-mark215"/>
           <p:cNvSpPr/>
           <p:nvPr/>
         </p:nvSpPr>
@@ -5573,7 +5573,7 @@
       </p:sp>
       <p:sp>
         <p:nvSpPr>
-          <p:cNvPr id="14" name="S11-mark238"/>
+          <p:cNvPr id="14" name="S11-mark216"/>
           <p:cNvSpPr/>
           <p:nvPr/>
         </p:nvSpPr>
@@ -5619,7 +5619,7 @@
       </p:sp>
       <p:sp>
         <p:nvSpPr>
-          <p:cNvPr id="15" name="S11-mark239"/>
+          <p:cNvPr id="15" name="S11-mark217"/>
           <p:cNvSpPr/>
           <p:nvPr/>
         </p:nvSpPr>
@@ -5662,14 +5662,14 @@
       </p:sp>
       <p:sp>
         <p:nvSpPr>
-          <p:cNvPr id="16" name="S11-mark240"/>
-          <p:cNvSpPr/>
-          <p:nvPr/>
-        </p:nvSpPr>
-        <p:spPr>
-          <a:xfrm>
-            <a:off x="5273040" y="3027680"/>
-            <a:ext cx="1095248" cy="821436"/>
+          <p:cNvPr id="16" name="S11-mark218"/>
+          <p:cNvSpPr/>
+          <p:nvPr/>
+        </p:nvSpPr>
+        <p:spPr>
+          <a:xfrm>
+            <a:off x="6368288" y="3191967"/>
+            <a:ext cx="1369060" cy="657149"/>
           </a:xfrm>
           <a:custGeom>
             <a:avLst/>
@@ -5678,15 +5678,15 @@
             <a:cxnLst/>
             <a:rect l="l" t="t" r="r" b="b"/>
             <a:pathLst>
-              <a:path w="1095248" h="821436">
+              <a:path w="1369060" h="657149">
                 <a:moveTo>
-                  <a:pt x="0" y="821436"/>
+                  <a:pt x="0" y="657149"/>
                 </a:moveTo>
                 <a:lnTo>
-                  <a:pt x="1095248" y="821436"/>
+                  <a:pt x="1369060" y="657149"/>
                 </a:lnTo>
                 <a:lnTo>
-                  <a:pt x="0" y="0"/>
+                  <a:pt x="876198" y="0"/>
                 </a:lnTo>
                 <a:close/>
               </a:path>
@@ -5705,7 +5705,7 @@
       </p:sp>
       <p:sp>
         <p:nvSpPr>
-          <p:cNvPr id="17" name="S11-chip241"/>
+          <p:cNvPr id="17" name="S11-chip219"/>
           <p:cNvSpPr txBox="1"/>
           <p:nvPr/>
         </p:nvSpPr>
@@ -5752,7 +5752,7 @@
       </p:sp>
       <p:sp>
         <p:nvSpPr>
-          <p:cNvPr id="18" name="S11-figure242" descr="다: 밑면 하나는 왼쪽 옆면 위에, 하나는 가운데 옆면 아래에 붙은 전개도"/>
+          <p:cNvPr id="18" name="S11-figure220" descr="다: 밑면 하나는 왼쪽 옆면 위에, 하나는 가운데 옆면 아래에 붙은 전개도"/>
           <p:cNvSpPr/>
           <p:nvPr/>
         </p:nvSpPr>
@@ -5798,7 +5798,7 @@
       </p:sp>
       <p:sp>
         <p:nvSpPr>
-          <p:cNvPr id="19" name="S11-mark243"/>
+          <p:cNvPr id="19" name="S11-mark221"/>
           <p:cNvSpPr/>
           <p:nvPr/>
         </p:nvSpPr>
@@ -5844,7 +5844,7 @@
       </p:sp>
       <p:sp>
         <p:nvSpPr>
-          <p:cNvPr id="20" name="S11-mark244"/>
+          <p:cNvPr id="20" name="S11-mark222"/>
           <p:cNvSpPr/>
           <p:nvPr/>
         </p:nvSpPr>
@@ -5890,7 +5890,7 @@
       </p:sp>
       <p:sp>
         <p:nvSpPr>
-          <p:cNvPr id="21" name="S11-mark245"/>
+          <p:cNvPr id="21" name="S11-mark223"/>
           <p:cNvSpPr/>
           <p:nvPr/>
         </p:nvSpPr>
@@ -5933,7 +5933,7 @@
       </p:sp>
       <p:sp>
         <p:nvSpPr>
-          <p:cNvPr id="22" name="S11-mark246"/>
+          <p:cNvPr id="22" name="S11-mark224"/>
           <p:cNvSpPr/>
           <p:nvPr/>
         </p:nvSpPr>
@@ -6090,7 +6090,7 @@
       </p:sp>
       <p:sp>
         <p:nvSpPr>
-          <p:cNvPr id="3" name="S12-figure247" descr="삼각기둥의 전개도: 옆면의 가로 3 cm, 4 cm, □ cm, 밑면 삼각형의 한 변 5 cm"/>
+          <p:cNvPr id="3" name="S12-figure225" descr="삼각기둥의 전개도: 옆면의 가로 3 cm, 4 cm, □ cm, 밑면 삼각형의 한 변 5 cm"/>
           <p:cNvSpPr/>
           <p:nvPr/>
         </p:nvSpPr>
@@ -6136,7 +6136,7 @@
       </p:sp>
       <p:sp>
         <p:nvSpPr>
-          <p:cNvPr id="4" name="S12-mark248"/>
+          <p:cNvPr id="4" name="S12-mark226"/>
           <p:cNvSpPr/>
           <p:nvPr/>
         </p:nvSpPr>
@@ -6182,7 +6182,7 @@
       </p:sp>
       <p:sp>
         <p:nvSpPr>
-          <p:cNvPr id="5" name="S12-mark249"/>
+          <p:cNvPr id="5" name="S12-mark227"/>
           <p:cNvSpPr/>
           <p:nvPr/>
         </p:nvSpPr>
@@ -6228,7 +6228,7 @@
       </p:sp>
       <p:sp>
         <p:nvSpPr>
-          <p:cNvPr id="6" name="S12-mark250"/>
+          <p:cNvPr id="6" name="S12-mark228"/>
           <p:cNvSpPr/>
           <p:nvPr/>
         </p:nvSpPr>
@@ -6271,7 +6271,7 @@
       </p:sp>
       <p:sp>
         <p:nvSpPr>
-          <p:cNvPr id="7" name="S12-mark251"/>
+          <p:cNvPr id="7" name="S12-mark229"/>
           <p:cNvSpPr/>
           <p:nvPr/>
         </p:nvSpPr>
@@ -6314,7 +6314,7 @@
       </p:sp>
       <p:sp>
         <p:nvSpPr>
-          <p:cNvPr id="8" name="S12-label253"/>
+          <p:cNvPr id="8" name="S12-label231"/>
           <p:cNvSpPr txBox="1"/>
           <p:nvPr/>
         </p:nvSpPr>
@@ -6345,7 +6345,7 @@
                 <a:ea typeface="맑은 고딕" pitchFamily="34" charset="-122"/>
                 <a:cs typeface="맑은 고딕" pitchFamily="34" charset="-120"/>
               </a:rPr>
-              <a:t>3 cm</a:t>
+              <a:t>3 cm</a:t>
             </a:r>
             <a:endParaRPr lang="ko-KR" sz="2200" dirty="0"/>
           </a:p>
@@ -6353,13 +6353,13 @@
       </p:sp>
       <p:sp>
         <p:nvSpPr>
-          <p:cNvPr id="9" name="S12-label255"/>
+          <p:cNvPr id="9" name="S12-label233"/>
           <p:cNvSpPr txBox="1"/>
           <p:nvPr/>
         </p:nvSpPr>
         <p:spPr>
           <a:xfrm>
-            <a:off x="8186039" y="4630801"/>
+            <a:off x="8186039" y="2954782"/>
             <a:ext cx="763524" cy="349250"/>
           </a:xfrm>
           <a:prstGeom prst="rect">
@@ -6384,7 +6384,7 @@
                 <a:ea typeface="맑은 고딕" pitchFamily="34" charset="-122"/>
                 <a:cs typeface="맑은 고딕" pitchFamily="34" charset="-120"/>
               </a:rPr>
-              <a:t>4 cm</a:t>
+              <a:t>4 cm</a:t>
             </a:r>
             <a:endParaRPr lang="ko-KR" sz="2200" dirty="0"/>
           </a:p>
@@ -6392,7 +6392,7 @@
       </p:sp>
       <p:sp>
         <p:nvSpPr>
-          <p:cNvPr id="10" name="S12-label257"/>
+          <p:cNvPr id="10" name="S12-label235"/>
           <p:cNvSpPr txBox="1"/>
           <p:nvPr/>
         </p:nvSpPr>
@@ -6431,13 +6431,13 @@
       </p:sp>
       <p:sp>
         <p:nvSpPr>
-          <p:cNvPr id="11" name="S12-label259"/>
+          <p:cNvPr id="11" name="S12-label237"/>
           <p:cNvSpPr txBox="1"/>
           <p:nvPr/>
         </p:nvSpPr>
         <p:spPr>
           <a:xfrm>
-            <a:off x="6476779" y="2168693"/>
+            <a:off x="6448168" y="2147235"/>
             <a:ext cx="763524" cy="349250"/>
           </a:xfrm>
           <a:prstGeom prst="rect">
@@ -6462,7 +6462,7 @@
                 <a:ea typeface="맑은 고딕" pitchFamily="34" charset="-122"/>
                 <a:cs typeface="맑은 고딕" pitchFamily="34" charset="-120"/>
               </a:rPr>
-              <a:t>5 cm</a:t>
+              <a:t>5 cm</a:t>
             </a:r>
             <a:endParaRPr lang="ko-KR" sz="2200" dirty="0"/>
           </a:p>
@@ -6470,7 +6470,7 @@
       </p:sp>
       <p:sp>
         <p:nvSpPr>
-          <p:cNvPr id="12" name="S12-chip260"/>
+          <p:cNvPr id="12" name="S12-chip238"/>
           <p:cNvSpPr txBox="1"/>
           <p:nvPr/>
         </p:nvSpPr>
@@ -6517,7 +6517,7 @@
       </p:sp>
       <p:sp>
         <p:nvSpPr>
-          <p:cNvPr id="13" name="S12-text261"/>
+          <p:cNvPr id="13" name="S12-text239"/>
           <p:cNvSpPr txBox="1"/>
           <p:nvPr/>
         </p:nvSpPr>
@@ -6573,7 +6573,7 @@
       </p:sp>
       <p:sp>
         <p:nvSpPr>
-          <p:cNvPr id="14" name="S12-chip262"/>
+          <p:cNvPr id="14" name="S12-chip240"/>
           <p:cNvSpPr txBox="1"/>
           <p:nvPr/>
         </p:nvSpPr>
@@ -6620,7 +6620,7 @@
       </p:sp>
       <p:sp>
         <p:nvSpPr>
-          <p:cNvPr id="15" name="S12-text263"/>
+          <p:cNvPr id="15" name="S12-text241"/>
           <p:cNvSpPr txBox="1"/>
           <p:nvPr/>
         </p:nvSpPr>
@@ -6676,7 +6676,7 @@
       </p:sp>
       <p:sp>
         <p:nvSpPr>
-          <p:cNvPr id="16" name="S12-chip264"/>
+          <p:cNvPr id="16" name="S12-chip242"/>
           <p:cNvSpPr txBox="1"/>
           <p:nvPr/>
         </p:nvSpPr>
@@ -6723,7 +6723,7 @@
       </p:sp>
       <p:sp>
         <p:nvSpPr>
-          <p:cNvPr id="17" name="S12-text265"/>
+          <p:cNvPr id="17" name="S12-text243"/>
           <p:cNvSpPr txBox="1"/>
           <p:nvPr/>
         </p:nvSpPr>
@@ -6779,7 +6779,7 @@
       </p:sp>
       <p:sp>
         <p:nvSpPr>
-          <p:cNvPr id="18" name="S12-chip266"/>
+          <p:cNvPr id="18" name="S12-chip244"/>
           <p:cNvSpPr txBox="1"/>
           <p:nvPr/>
         </p:nvSpPr>
@@ -6826,7 +6826,7 @@
       </p:sp>
       <p:sp>
         <p:nvSpPr>
-          <p:cNvPr id="19" name="S12-text267"/>
+          <p:cNvPr id="19" name="S12-text245"/>
           <p:cNvSpPr txBox="1"/>
           <p:nvPr/>
         </p:nvSpPr>
@@ -6979,7 +6979,7 @@
       </p:sp>
       <p:sp>
         <p:nvSpPr>
-          <p:cNvPr id="3" name="S14-card268"/>
+          <p:cNvPr id="3" name="S14-card246"/>
           <p:cNvSpPr/>
           <p:nvPr/>
         </p:nvSpPr>
@@ -7006,7 +7006,7 @@
       </p:sp>
       <p:sp>
         <p:nvSpPr>
-          <p:cNvPr id="4" name="S14-cardtext269"/>
+          <p:cNvPr id="4" name="S14-cardtext247"/>
           <p:cNvSpPr txBox="1"/>
           <p:nvPr/>
         </p:nvSpPr>
@@ -7048,7 +7048,7 @@
       </p:sp>
       <p:sp>
         <p:nvSpPr>
-          <p:cNvPr id="5" name="S14-chip270"/>
+          <p:cNvPr id="5" name="S14-chip248"/>
           <p:cNvSpPr txBox="1"/>
           <p:nvPr/>
         </p:nvSpPr>
@@ -7095,7 +7095,7 @@
       </p:sp>
       <p:sp>
         <p:nvSpPr>
-          <p:cNvPr id="6" name="S14-card271"/>
+          <p:cNvPr id="6" name="S14-card249"/>
           <p:cNvSpPr/>
           <p:nvPr/>
         </p:nvSpPr>
@@ -7122,7 +7122,7 @@
       </p:sp>
       <p:sp>
         <p:nvSpPr>
-          <p:cNvPr id="7" name="S14-cardtext272"/>
+          <p:cNvPr id="7" name="S14-cardtext250"/>
           <p:cNvSpPr txBox="1"/>
           <p:nvPr/>
         </p:nvSpPr>
@@ -7184,7 +7184,7 @@
       </p:sp>
       <p:sp>
         <p:nvSpPr>
-          <p:cNvPr id="8" name="S14-chip273"/>
+          <p:cNvPr id="8" name="S14-chip251"/>
           <p:cNvSpPr txBox="1"/>
           <p:nvPr/>
         </p:nvSpPr>
@@ -7231,7 +7231,7 @@
       </p:sp>
       <p:sp>
         <p:nvSpPr>
-          <p:cNvPr id="9" name="S14-card274"/>
+          <p:cNvPr id="9" name="S14-card252"/>
           <p:cNvSpPr/>
           <p:nvPr/>
         </p:nvSpPr>
@@ -7258,7 +7258,7 @@
       </p:sp>
       <p:sp>
         <p:nvSpPr>
-          <p:cNvPr id="10" name="S14-cardtext275"/>
+          <p:cNvPr id="10" name="S14-cardtext253"/>
           <p:cNvSpPr txBox="1"/>
           <p:nvPr/>
         </p:nvSpPr>
@@ -7320,7 +7320,7 @@
       </p:sp>
       <p:sp>
         <p:nvSpPr>
-          <p:cNvPr id="11" name="S14-chip276"/>
+          <p:cNvPr id="11" name="S14-chip254"/>
           <p:cNvSpPr txBox="1"/>
           <p:nvPr/>
         </p:nvSpPr>
@@ -7367,7 +7367,7 @@
       </p:sp>
       <p:sp>
         <p:nvSpPr>
-          <p:cNvPr id="12" name="S14-card277"/>
+          <p:cNvPr id="12" name="S14-card255"/>
           <p:cNvSpPr/>
           <p:nvPr/>
         </p:nvSpPr>
@@ -7394,7 +7394,7 @@
       </p:sp>
       <p:sp>
         <p:nvSpPr>
-          <p:cNvPr id="13" name="S14-cardtext278"/>
+          <p:cNvPr id="13" name="S14-cardtext256"/>
           <p:cNvSpPr txBox="1"/>
           <p:nvPr/>
         </p:nvSpPr>
@@ -7456,7 +7456,7 @@
       </p:sp>
       <p:sp>
         <p:nvSpPr>
-          <p:cNvPr id="14" name="S14-chip279"/>
+          <p:cNvPr id="14" name="S14-chip257"/>
           <p:cNvSpPr txBox="1"/>
           <p:nvPr/>
         </p:nvSpPr>
@@ -7503,7 +7503,7 @@
       </p:sp>
       <p:sp>
         <p:nvSpPr>
-          <p:cNvPr id="15" name="S14-card280"/>
+          <p:cNvPr id="15" name="S14-card258"/>
           <p:cNvSpPr/>
           <p:nvPr/>
         </p:nvSpPr>
@@ -7530,7 +7530,7 @@
       </p:sp>
       <p:sp>
         <p:nvSpPr>
-          <p:cNvPr id="16" name="S14-cardtext281"/>
+          <p:cNvPr id="16" name="S14-cardtext259"/>
           <p:cNvSpPr txBox="1"/>
           <p:nvPr/>
         </p:nvSpPr>
@@ -7706,7 +7706,7 @@
       </p:sp>
       <p:sp>
         <p:nvSpPr>
-          <p:cNvPr id="3" name="S15-card282"/>
+          <p:cNvPr id="3" name="S15-card260"/>
           <p:cNvSpPr/>
           <p:nvPr/>
         </p:nvSpPr>
@@ -7733,7 +7733,7 @@
       </p:sp>
       <p:sp>
         <p:nvSpPr>
-          <p:cNvPr id="4" name="S15-cardtext283"/>
+          <p:cNvPr id="4" name="S15-cardtext261"/>
           <p:cNvSpPr txBox="1"/>
           <p:nvPr/>
         </p:nvSpPr>
@@ -7775,7 +7775,7 @@
       </p:sp>
       <p:sp>
         <p:nvSpPr>
-          <p:cNvPr id="5" name="S15-chip284"/>
+          <p:cNvPr id="5" name="S15-chip262"/>
           <p:cNvSpPr txBox="1"/>
           <p:nvPr/>
         </p:nvSpPr>
@@ -7822,7 +7822,7 @@
       </p:sp>
       <p:sp>
         <p:nvSpPr>
-          <p:cNvPr id="6" name="S15-chip285"/>
+          <p:cNvPr id="6" name="S15-chip263"/>
           <p:cNvSpPr txBox="1"/>
           <p:nvPr/>
         </p:nvSpPr>
@@ -7869,7 +7869,7 @@
       </p:sp>
       <p:sp>
         <p:nvSpPr>
-          <p:cNvPr id="7" name="S15-text286"/>
+          <p:cNvPr id="7" name="S15-text264"/>
           <p:cNvSpPr txBox="1"/>
           <p:nvPr/>
         </p:nvSpPr>
@@ -7908,7 +7908,7 @@
       </p:sp>
       <p:sp>
         <p:nvSpPr>
-          <p:cNvPr id="8" name="S15-text287"/>
+          <p:cNvPr id="8" name="S15-text265"/>
           <p:cNvSpPr txBox="1"/>
           <p:nvPr/>
         </p:nvSpPr>
@@ -7964,7 +7964,7 @@
       </p:sp>
       <p:sp>
         <p:nvSpPr>
-          <p:cNvPr id="9" name="S15-text288"/>
+          <p:cNvPr id="9" name="S15-text266"/>
           <p:cNvSpPr txBox="1"/>
           <p:nvPr/>
         </p:nvSpPr>
@@ -8020,7 +8020,7 @@
       </p:sp>
       <p:sp>
         <p:nvSpPr>
-          <p:cNvPr id="10" name="S15-text289"/>
+          <p:cNvPr id="10" name="S15-text267"/>
           <p:cNvSpPr txBox="1"/>
           <p:nvPr/>
         </p:nvSpPr>
@@ -8076,7 +8076,7 @@
       </p:sp>
       <p:sp>
         <p:nvSpPr>
-          <p:cNvPr id="11" name="S15-text290"/>
+          <p:cNvPr id="11" name="S15-text268"/>
           <p:cNvSpPr txBox="1"/>
           <p:nvPr/>
         </p:nvSpPr>
@@ -8229,7 +8229,7 @@
       </p:sp>
       <p:sp>
         <p:nvSpPr>
-          <p:cNvPr id="3" name="S16-figure291" descr="직육면체의 겨냥도: 보이는 모서리 9개는 실선, 보이지 않는 모서리 3개는 점선"/>
+          <p:cNvPr id="3" name="S16-figure269" descr="직육면체의 겨냥도: 보이는 모서리 9개는 실선, 보이지 않는 모서리 3개는 점선"/>
           <p:cNvSpPr/>
           <p:nvPr/>
         </p:nvSpPr>
@@ -8252,7 +8252,7 @@
       </p:sp>
       <p:sp>
         <p:nvSpPr>
-          <p:cNvPr id="4" name="S16-mark292"/>
+          <p:cNvPr id="4" name="S16-mark270"/>
           <p:cNvSpPr/>
           <p:nvPr/>
         </p:nvSpPr>
@@ -8275,7 +8275,7 @@
       </p:sp>
       <p:sp>
         <p:nvSpPr>
-          <p:cNvPr id="5" name="S16-mark293"/>
+          <p:cNvPr id="5" name="S16-mark271"/>
           <p:cNvSpPr/>
           <p:nvPr/>
         </p:nvSpPr>
@@ -8298,7 +8298,7 @@
       </p:sp>
       <p:sp>
         <p:nvSpPr>
-          <p:cNvPr id="6" name="S16-mark294"/>
+          <p:cNvPr id="6" name="S16-mark272"/>
           <p:cNvSpPr/>
           <p:nvPr/>
         </p:nvSpPr>
@@ -8321,7 +8321,7 @@
       </p:sp>
       <p:sp>
         <p:nvSpPr>
-          <p:cNvPr id="7" name="S16-mark295"/>
+          <p:cNvPr id="7" name="S16-mark273"/>
           <p:cNvSpPr/>
           <p:nvPr/>
         </p:nvSpPr>
@@ -8344,7 +8344,7 @@
       </p:sp>
       <p:sp>
         <p:nvSpPr>
-          <p:cNvPr id="8" name="S16-mark296"/>
+          <p:cNvPr id="8" name="S16-mark274"/>
           <p:cNvSpPr/>
           <p:nvPr/>
         </p:nvSpPr>
@@ -8367,7 +8367,7 @@
       </p:sp>
       <p:sp>
         <p:nvSpPr>
-          <p:cNvPr id="9" name="S16-mark297"/>
+          <p:cNvPr id="9" name="S16-mark275"/>
           <p:cNvSpPr/>
           <p:nvPr/>
         </p:nvSpPr>
@@ -8390,7 +8390,7 @@
       </p:sp>
       <p:sp>
         <p:nvSpPr>
-          <p:cNvPr id="10" name="S16-mark298"/>
+          <p:cNvPr id="10" name="S16-mark276"/>
           <p:cNvSpPr/>
           <p:nvPr/>
         </p:nvSpPr>
@@ -8413,7 +8413,7 @@
       </p:sp>
       <p:sp>
         <p:nvSpPr>
-          <p:cNvPr id="11" name="S16-mark299"/>
+          <p:cNvPr id="11" name="S16-mark277"/>
           <p:cNvSpPr/>
           <p:nvPr/>
         </p:nvSpPr>
@@ -8436,7 +8436,7 @@
       </p:sp>
       <p:sp>
         <p:nvSpPr>
-          <p:cNvPr id="12" name="S16-mark300"/>
+          <p:cNvPr id="12" name="S16-mark278"/>
           <p:cNvSpPr/>
           <p:nvPr/>
         </p:nvSpPr>
@@ -8459,7 +8459,7 @@
       </p:sp>
       <p:sp>
         <p:nvSpPr>
-          <p:cNvPr id="13" name="S16-mark301"/>
+          <p:cNvPr id="13" name="S16-mark279"/>
           <p:cNvSpPr/>
           <p:nvPr/>
         </p:nvSpPr>
@@ -8482,7 +8482,7 @@
       </p:sp>
       <p:sp>
         <p:nvSpPr>
-          <p:cNvPr id="14" name="S16-mark302"/>
+          <p:cNvPr id="14" name="S16-mark280"/>
           <p:cNvSpPr/>
           <p:nvPr/>
         </p:nvSpPr>
@@ -8505,7 +8505,7 @@
       </p:sp>
       <p:sp>
         <p:nvSpPr>
-          <p:cNvPr id="15" name="S16-card303"/>
+          <p:cNvPr id="15" name="S16-card281"/>
           <p:cNvSpPr/>
           <p:nvPr/>
         </p:nvSpPr>
@@ -8532,7 +8532,7 @@
       </p:sp>
       <p:sp>
         <p:nvSpPr>
-          <p:cNvPr id="16" name="S16-cardtext304"/>
+          <p:cNvPr id="16" name="S16-cardtext282"/>
           <p:cNvSpPr txBox="1"/>
           <p:nvPr/>
         </p:nvSpPr>
@@ -8594,7 +8594,7 @@
       </p:sp>
       <p:sp>
         <p:nvSpPr>
-          <p:cNvPr id="17" name="S16-card305"/>
+          <p:cNvPr id="17" name="S16-card283"/>
           <p:cNvSpPr/>
           <p:nvPr/>
         </p:nvSpPr>
@@ -8621,7 +8621,7 @@
       </p:sp>
       <p:sp>
         <p:nvSpPr>
-          <p:cNvPr id="18" name="S16-cardtext306"/>
+          <p:cNvPr id="18" name="S16-cardtext284"/>
           <p:cNvSpPr txBox="1"/>
           <p:nvPr/>
         </p:nvSpPr>
@@ -9654,14 +9654,424 @@
       </p:sp>
       <p:sp>
         <p:nvSpPr>
-          <p:cNvPr id="5" name="S03-card37"/>
-          <p:cNvSpPr/>
-          <p:nvPr/>
-        </p:nvSpPr>
-        <p:spPr>
-          <a:xfrm>
-            <a:off x="548640" y="3599688"/>
-            <a:ext cx="5431536" cy="1520952"/>
+          <p:cNvPr id="5" name="S03-figure37" descr="삼각기둥의 겨냥도: 위아래 밑면(삼각형)을 색칠, 보이지 않는 모서리 3개는 점선"/>
+          <p:cNvSpPr/>
+          <p:nvPr/>
+        </p:nvSpPr>
+        <p:spPr>
+          <a:xfrm>
+            <a:off x="1087450" y="4208526"/>
+            <a:ext cx="2926080" cy="681228"/>
+          </a:xfrm>
+          <a:custGeom>
+            <a:avLst/>
+            <a:gdLst/>
+            <a:ahLst/>
+            <a:cxnLst/>
+            <a:rect l="l" t="t" r="r" b="b"/>
+            <a:pathLst>
+              <a:path w="2926080" h="681228">
+                <a:moveTo>
+                  <a:pt x="0" y="681228"/>
+                </a:moveTo>
+                <a:lnTo>
+                  <a:pt x="2926080" y="681228"/>
+                </a:lnTo>
+                <a:lnTo>
+                  <a:pt x="1968703" y="0"/>
+                </a:lnTo>
+                <a:close/>
+              </a:path>
+            </a:pathLst>
+          </a:custGeom>
+          <a:solidFill>
+            <a:srgbClr val="F2C14E"/>
+          </a:solidFill>
+          <a:ln w="28575">
+            <a:solidFill>
+              <a:srgbClr val="1F2937"/>
+            </a:solidFill>
+            <a:prstDash val="dash"/>
+          </a:ln>
+        </p:spPr>
+      </p:sp>
+      <p:sp>
+        <p:nvSpPr>
+          <p:cNvPr id="6" name="S03-mark38"/>
+          <p:cNvSpPr/>
+          <p:nvPr/>
+        </p:nvSpPr>
+        <p:spPr>
+          <a:xfrm>
+            <a:off x="1087450" y="1465326"/>
+            <a:ext cx="2926080" cy="681228"/>
+          </a:xfrm>
+          <a:custGeom>
+            <a:avLst/>
+            <a:gdLst/>
+            <a:ahLst/>
+            <a:cxnLst/>
+            <a:rect l="l" t="t" r="r" b="b"/>
+            <a:pathLst>
+              <a:path w="2926080" h="681228">
+                <a:moveTo>
+                  <a:pt x="0" y="681228"/>
+                </a:moveTo>
+                <a:lnTo>
+                  <a:pt x="2926080" y="681228"/>
+                </a:lnTo>
+                <a:lnTo>
+                  <a:pt x="1968703" y="0"/>
+                </a:lnTo>
+                <a:close/>
+              </a:path>
+            </a:pathLst>
+          </a:custGeom>
+          <a:solidFill>
+            <a:srgbClr val="F2C14E"/>
+          </a:solidFill>
+          <a:ln w="28575">
+            <a:solidFill>
+              <a:srgbClr val="1F2937"/>
+            </a:solidFill>
+            <a:prstDash val="solid"/>
+          </a:ln>
+        </p:spPr>
+      </p:sp>
+      <p:sp>
+        <p:nvSpPr>
+          <p:cNvPr id="7" name="S03-mark39"/>
+          <p:cNvSpPr/>
+          <p:nvPr/>
+        </p:nvSpPr>
+        <p:spPr>
+          <a:xfrm flipH="1" flipV="1">
+            <a:off x="3056153" y="4208526"/>
+            <a:ext cx="957377" cy="681228"/>
+          </a:xfrm>
+          <a:prstGeom prst="line">
+            <a:avLst/>
+          </a:prstGeom>
+          <a:noFill/>
+          <a:ln w="22225">
+            <a:solidFill>
+              <a:srgbClr val="1F2937"/>
+            </a:solidFill>
+            <a:prstDash val="dash"/>
+          </a:ln>
+        </p:spPr>
+      </p:sp>
+      <p:sp>
+        <p:nvSpPr>
+          <p:cNvPr id="8" name="S03-mark40"/>
+          <p:cNvSpPr/>
+          <p:nvPr/>
+        </p:nvSpPr>
+        <p:spPr>
+          <a:xfrm flipV="1">
+            <a:off x="1087450" y="4208526"/>
+            <a:ext cx="1968703" cy="681228"/>
+          </a:xfrm>
+          <a:prstGeom prst="line">
+            <a:avLst/>
+          </a:prstGeom>
+          <a:noFill/>
+          <a:ln w="22225">
+            <a:solidFill>
+              <a:srgbClr val="1F2937"/>
+            </a:solidFill>
+            <a:prstDash val="dash"/>
+          </a:ln>
+        </p:spPr>
+      </p:sp>
+      <p:sp>
+        <p:nvSpPr>
+          <p:cNvPr id="9" name="S03-mark41"/>
+          <p:cNvSpPr/>
+          <p:nvPr/>
+        </p:nvSpPr>
+        <p:spPr>
+          <a:xfrm flipV="1">
+            <a:off x="3056153" y="1465326"/>
+            <a:ext cx="0" cy="2743200"/>
+          </a:xfrm>
+          <a:prstGeom prst="line">
+            <a:avLst/>
+          </a:prstGeom>
+          <a:noFill/>
+          <a:ln w="22225">
+            <a:solidFill>
+              <a:srgbClr val="1F2937"/>
+            </a:solidFill>
+            <a:prstDash val="dash"/>
+          </a:ln>
+        </p:spPr>
+      </p:sp>
+      <p:sp>
+        <p:nvSpPr>
+          <p:cNvPr id="10" name="S03-mark42"/>
+          <p:cNvSpPr/>
+          <p:nvPr/>
+        </p:nvSpPr>
+        <p:spPr>
+          <a:xfrm>
+            <a:off x="1087450" y="4889754"/>
+            <a:ext cx="2926080" cy="0"/>
+          </a:xfrm>
+          <a:prstGeom prst="line">
+            <a:avLst/>
+          </a:prstGeom>
+          <a:noFill/>
+          <a:ln w="28575">
+            <a:solidFill>
+              <a:srgbClr val="1F2937"/>
+            </a:solidFill>
+            <a:prstDash val="solid"/>
+          </a:ln>
+        </p:spPr>
+      </p:sp>
+      <p:sp>
+        <p:nvSpPr>
+          <p:cNvPr id="11" name="S03-mark43"/>
+          <p:cNvSpPr/>
+          <p:nvPr/>
+        </p:nvSpPr>
+        <p:spPr>
+          <a:xfrm>
+            <a:off x="1087450" y="2146554"/>
+            <a:ext cx="2926080" cy="0"/>
+          </a:xfrm>
+          <a:prstGeom prst="line">
+            <a:avLst/>
+          </a:prstGeom>
+          <a:noFill/>
+          <a:ln w="28575">
+            <a:solidFill>
+              <a:srgbClr val="1F2937"/>
+            </a:solidFill>
+            <a:prstDash val="solid"/>
+          </a:ln>
+        </p:spPr>
+      </p:sp>
+      <p:sp>
+        <p:nvSpPr>
+          <p:cNvPr id="12" name="S03-mark44"/>
+          <p:cNvSpPr/>
+          <p:nvPr/>
+        </p:nvSpPr>
+        <p:spPr>
+          <a:xfrm flipH="1" flipV="1">
+            <a:off x="3056153" y="1465326"/>
+            <a:ext cx="957377" cy="681228"/>
+          </a:xfrm>
+          <a:prstGeom prst="line">
+            <a:avLst/>
+          </a:prstGeom>
+          <a:noFill/>
+          <a:ln w="28575">
+            <a:solidFill>
+              <a:srgbClr val="1F2937"/>
+            </a:solidFill>
+            <a:prstDash val="solid"/>
+          </a:ln>
+        </p:spPr>
+      </p:sp>
+      <p:sp>
+        <p:nvSpPr>
+          <p:cNvPr id="13" name="S03-mark45"/>
+          <p:cNvSpPr/>
+          <p:nvPr/>
+        </p:nvSpPr>
+        <p:spPr>
+          <a:xfrm flipV="1">
+            <a:off x="1087450" y="1465326"/>
+            <a:ext cx="1968703" cy="681228"/>
+          </a:xfrm>
+          <a:prstGeom prst="line">
+            <a:avLst/>
+          </a:prstGeom>
+          <a:noFill/>
+          <a:ln w="28575">
+            <a:solidFill>
+              <a:srgbClr val="1F2937"/>
+            </a:solidFill>
+            <a:prstDash val="solid"/>
+          </a:ln>
+        </p:spPr>
+      </p:sp>
+      <p:sp>
+        <p:nvSpPr>
+          <p:cNvPr id="14" name="S03-mark46"/>
+          <p:cNvSpPr/>
+          <p:nvPr/>
+        </p:nvSpPr>
+        <p:spPr>
+          <a:xfrm flipV="1">
+            <a:off x="4013530" y="2146554"/>
+            <a:ext cx="0" cy="2743200"/>
+          </a:xfrm>
+          <a:prstGeom prst="line">
+            <a:avLst/>
+          </a:prstGeom>
+          <a:noFill/>
+          <a:ln w="28575">
+            <a:solidFill>
+              <a:srgbClr val="1F2937"/>
+            </a:solidFill>
+            <a:prstDash val="solid"/>
+          </a:ln>
+        </p:spPr>
+      </p:sp>
+      <p:sp>
+        <p:nvSpPr>
+          <p:cNvPr id="15" name="S03-mark47"/>
+          <p:cNvSpPr/>
+          <p:nvPr/>
+        </p:nvSpPr>
+        <p:spPr>
+          <a:xfrm flipV="1">
+            <a:off x="1087450" y="2146554"/>
+            <a:ext cx="0" cy="2743200"/>
+          </a:xfrm>
+          <a:prstGeom prst="line">
+            <a:avLst/>
+          </a:prstGeom>
+          <a:noFill/>
+          <a:ln w="28575">
+            <a:solidFill>
+              <a:srgbClr val="1F2937"/>
+            </a:solidFill>
+            <a:prstDash val="solid"/>
+          </a:ln>
+        </p:spPr>
+      </p:sp>
+      <p:sp>
+        <p:nvSpPr>
+          <p:cNvPr id="16" name="S03-label49"/>
+          <p:cNvSpPr txBox="1"/>
+          <p:nvPr/>
+        </p:nvSpPr>
+        <p:spPr>
+          <a:xfrm>
+            <a:off x="4507814" y="1651889"/>
+            <a:ext cx="657352" cy="349250"/>
+          </a:xfrm>
+          <a:prstGeom prst="rect">
+            <a:avLst/>
+          </a:prstGeom>
+          <a:noFill/>
+          <a:ln/>
+        </p:spPr>
+        <p:txBody>
+          <a:bodyPr wrap="square" lIns="0" tIns="0" rIns="0" bIns="0" rtlCol="0" anchor="ctr"/>
+          <a:lstStyle/>
+          <a:p>
+            <a:pPr eaLnBrk="0" algn="ctr" indent="0" marL="0">
+              <a:buNone/>
+            </a:pPr>
+            <a:r>
+              <a:rPr lang="ko-KR" altLang="en-US" sz="2200" b="1" dirty="0">
+                <a:solidFill>
+                  <a:srgbClr val="1F2937"/>
+                </a:solidFill>
+                <a:latin typeface="맑은 고딕" pitchFamily="34" charset="0"/>
+                <a:ea typeface="맑은 고딕" pitchFamily="34" charset="-122"/>
+                <a:cs typeface="맑은 고딕" pitchFamily="34" charset="-120"/>
+              </a:rPr>
+              <a:t>밑면</a:t>
+            </a:r>
+            <a:endParaRPr lang="ko-KR" sz="2200" dirty="0"/>
+          </a:p>
+        </p:txBody>
+      </p:sp>
+      <p:sp>
+        <p:nvSpPr>
+          <p:cNvPr id="17" name="S03-label51"/>
+          <p:cNvSpPr txBox="1"/>
+          <p:nvPr/>
+        </p:nvSpPr>
+        <p:spPr>
+          <a:xfrm>
+            <a:off x="4507814" y="4806569"/>
+            <a:ext cx="657352" cy="349250"/>
+          </a:xfrm>
+          <a:prstGeom prst="rect">
+            <a:avLst/>
+          </a:prstGeom>
+          <a:noFill/>
+          <a:ln/>
+        </p:spPr>
+        <p:txBody>
+          <a:bodyPr wrap="square" lIns="0" tIns="0" rIns="0" bIns="0" rtlCol="0" anchor="ctr"/>
+          <a:lstStyle/>
+          <a:p>
+            <a:pPr eaLnBrk="0" algn="ctr" indent="0" marL="0">
+              <a:buNone/>
+            </a:pPr>
+            <a:r>
+              <a:rPr lang="ko-KR" altLang="en-US" sz="2200" b="1" dirty="0">
+                <a:solidFill>
+                  <a:srgbClr val="1F2937"/>
+                </a:solidFill>
+                <a:latin typeface="맑은 고딕" pitchFamily="34" charset="0"/>
+                <a:ea typeface="맑은 고딕" pitchFamily="34" charset="-122"/>
+                <a:cs typeface="맑은 고딕" pitchFamily="34" charset="-120"/>
+              </a:rPr>
+              <a:t>밑면</a:t>
+            </a:r>
+            <a:endParaRPr lang="ko-KR" sz="2200" dirty="0"/>
+          </a:p>
+        </p:txBody>
+      </p:sp>
+      <p:sp>
+        <p:nvSpPr>
+          <p:cNvPr id="18" name="S03-label53"/>
+          <p:cNvSpPr txBox="1"/>
+          <p:nvPr/>
+        </p:nvSpPr>
+        <p:spPr>
+          <a:xfrm>
+            <a:off x="2176094" y="3343529"/>
+            <a:ext cx="657352" cy="349250"/>
+          </a:xfrm>
+          <a:prstGeom prst="rect">
+            <a:avLst/>
+          </a:prstGeom>
+          <a:noFill/>
+          <a:ln/>
+        </p:spPr>
+        <p:txBody>
+          <a:bodyPr wrap="square" lIns="0" tIns="0" rIns="0" bIns="0" rtlCol="0" anchor="ctr"/>
+          <a:lstStyle/>
+          <a:p>
+            <a:pPr eaLnBrk="0" algn="ctr" indent="0" marL="0">
+              <a:buNone/>
+            </a:pPr>
+            <a:r>
+              <a:rPr lang="ko-KR" altLang="en-US" sz="2200" b="1" dirty="0">
+                <a:solidFill>
+                  <a:srgbClr val="1F2937"/>
+                </a:solidFill>
+                <a:latin typeface="맑은 고딕" pitchFamily="34" charset="0"/>
+                <a:ea typeface="맑은 고딕" pitchFamily="34" charset="-122"/>
+                <a:cs typeface="맑은 고딕" pitchFamily="34" charset="-120"/>
+              </a:rPr>
+              <a:t>옆면</a:t>
+            </a:r>
+            <a:endParaRPr lang="ko-KR" sz="2200" dirty="0"/>
+          </a:p>
+        </p:txBody>
+      </p:sp>
+      <p:sp>
+        <p:nvSpPr>
+          <p:cNvPr id="19" name="S03-card54"/>
+          <p:cNvSpPr/>
+          <p:nvPr/>
+        </p:nvSpPr>
+        <p:spPr>
+          <a:xfrm>
+            <a:off x="5741060" y="1588008"/>
+            <a:ext cx="5899252" cy="1520952"/>
           </a:xfrm>
           <a:prstGeom prst="roundRect">
             <a:avLst>
@@ -9681,14 +10091,14 @@
       </p:sp>
       <p:sp>
         <p:nvSpPr>
-          <p:cNvPr id="6" name="S03-cardtext38"/>
+          <p:cNvPr id="20" name="S03-cardtext55"/>
           <p:cNvSpPr txBox="1"/>
           <p:nvPr/>
         </p:nvSpPr>
         <p:spPr>
           <a:xfrm>
-            <a:off x="822960" y="3736848"/>
-            <a:ext cx="4882896" cy="1246632"/>
+            <a:off x="6015380" y="1725168"/>
+            <a:ext cx="5350612" cy="1246632"/>
           </a:xfrm>
           <a:prstGeom prst="rect">
             <a:avLst/>
@@ -9763,14 +10173,14 @@
       </p:sp>
       <p:sp>
         <p:nvSpPr>
-          <p:cNvPr id="7" name="S03-card39"/>
-          <p:cNvSpPr/>
-          <p:nvPr/>
-        </p:nvSpPr>
-        <p:spPr>
-          <a:xfrm>
-            <a:off x="6208776" y="3599688"/>
-            <a:ext cx="5431536" cy="1520952"/>
+          <p:cNvPr id="21" name="S03-card56"/>
+          <p:cNvSpPr/>
+          <p:nvPr/>
+        </p:nvSpPr>
+        <p:spPr>
+          <a:xfrm>
+            <a:off x="5741060" y="3337560"/>
+            <a:ext cx="5899252" cy="1520952"/>
           </a:xfrm>
           <a:prstGeom prst="roundRect">
             <a:avLst>
@@ -9790,14 +10200,14 @@
       </p:sp>
       <p:sp>
         <p:nvSpPr>
-          <p:cNvPr id="8" name="S03-cardtext40"/>
+          <p:cNvPr id="22" name="S03-cardtext57"/>
           <p:cNvSpPr txBox="1"/>
           <p:nvPr/>
         </p:nvSpPr>
         <p:spPr>
           <a:xfrm>
-            <a:off x="6483096" y="3736848"/>
-            <a:ext cx="4882896" cy="1246632"/>
+            <a:off x="6015380" y="3474720"/>
+            <a:ext cx="5350612" cy="1246632"/>
           </a:xfrm>
           <a:prstGeom prst="rect">
             <a:avLst/>
@@ -9867,937 +10277,6 @@
               <a:t>모두 직사각형</a:t>
             </a:r>
             <a:endParaRPr lang="ko-KR" sz="2800" dirty="0"/>
-          </a:p>
-        </p:txBody>
-      </p:sp>
-      <p:sp>
-        <p:nvSpPr>
-          <p:cNvPr id="9" name="S03-figure41" descr="삼각기둥의 겨냥도: 위아래 밑면(삼각형)을 색칠, 보이지 않는 모서리 3개는 점선"/>
-          <p:cNvSpPr/>
-          <p:nvPr/>
-        </p:nvSpPr>
-        <p:spPr>
-          <a:xfrm>
-            <a:off x="2480608" y="2523270"/>
-            <a:ext cx="1187808" cy="276537"/>
-          </a:xfrm>
-          <a:custGeom>
-            <a:avLst/>
-            <a:gdLst/>
-            <a:ahLst/>
-            <a:cxnLst/>
-            <a:rect l="l" t="t" r="r" b="b"/>
-            <a:pathLst>
-              <a:path w="1187808" h="276537">
-                <a:moveTo>
-                  <a:pt x="0" y="276537"/>
-                </a:moveTo>
-                <a:lnTo>
-                  <a:pt x="1187808" y="276537"/>
-                </a:lnTo>
-                <a:lnTo>
-                  <a:pt x="799172" y="0"/>
-                </a:lnTo>
-                <a:close/>
-              </a:path>
-            </a:pathLst>
-          </a:custGeom>
-          <a:solidFill>
-            <a:srgbClr val="F2C14E"/>
-          </a:solidFill>
-          <a:ln w="28575">
-            <a:solidFill>
-              <a:srgbClr val="1F2937"/>
-            </a:solidFill>
-            <a:prstDash val="dash"/>
-          </a:ln>
-        </p:spPr>
-      </p:sp>
-      <p:sp>
-        <p:nvSpPr>
-          <p:cNvPr id="10" name="S03-mark42"/>
-          <p:cNvSpPr/>
-          <p:nvPr/>
-        </p:nvSpPr>
-        <p:spPr>
-          <a:xfrm>
-            <a:off x="2480608" y="1409700"/>
-            <a:ext cx="1187808" cy="276537"/>
-          </a:xfrm>
-          <a:custGeom>
-            <a:avLst/>
-            <a:gdLst/>
-            <a:ahLst/>
-            <a:cxnLst/>
-            <a:rect l="l" t="t" r="r" b="b"/>
-            <a:pathLst>
-              <a:path w="1187808" h="276537">
-                <a:moveTo>
-                  <a:pt x="0" y="276537"/>
-                </a:moveTo>
-                <a:lnTo>
-                  <a:pt x="1187808" y="276537"/>
-                </a:lnTo>
-                <a:lnTo>
-                  <a:pt x="799172" y="0"/>
-                </a:lnTo>
-                <a:close/>
-              </a:path>
-            </a:pathLst>
-          </a:custGeom>
-          <a:solidFill>
-            <a:srgbClr val="F2C14E"/>
-          </a:solidFill>
-          <a:ln w="28575">
-            <a:solidFill>
-              <a:srgbClr val="1F2937"/>
-            </a:solidFill>
-            <a:prstDash val="solid"/>
-          </a:ln>
-        </p:spPr>
-      </p:sp>
-      <p:sp>
-        <p:nvSpPr>
-          <p:cNvPr id="11" name="S03-mark43"/>
-          <p:cNvSpPr/>
-          <p:nvPr/>
-        </p:nvSpPr>
-        <p:spPr>
-          <a:xfrm flipH="1" flipV="1">
-            <a:off x="3279781" y="2523270"/>
-            <a:ext cx="388636" cy="276537"/>
-          </a:xfrm>
-          <a:prstGeom prst="line">
-            <a:avLst/>
-          </a:prstGeom>
-          <a:noFill/>
-          <a:ln w="22225">
-            <a:solidFill>
-              <a:srgbClr val="1F2937"/>
-            </a:solidFill>
-            <a:prstDash val="dash"/>
-          </a:ln>
-        </p:spPr>
-      </p:sp>
-      <p:sp>
-        <p:nvSpPr>
-          <p:cNvPr id="12" name="S03-mark44"/>
-          <p:cNvSpPr/>
-          <p:nvPr/>
-        </p:nvSpPr>
-        <p:spPr>
-          <a:xfrm flipV="1">
-            <a:off x="2480608" y="2523270"/>
-            <a:ext cx="799172" cy="276537"/>
-          </a:xfrm>
-          <a:prstGeom prst="line">
-            <a:avLst/>
-          </a:prstGeom>
-          <a:noFill/>
-          <a:ln w="22225">
-            <a:solidFill>
-              <a:srgbClr val="1F2937"/>
-            </a:solidFill>
-            <a:prstDash val="dash"/>
-          </a:ln>
-        </p:spPr>
-      </p:sp>
-      <p:sp>
-        <p:nvSpPr>
-          <p:cNvPr id="13" name="S03-mark45"/>
-          <p:cNvSpPr/>
-          <p:nvPr/>
-        </p:nvSpPr>
-        <p:spPr>
-          <a:xfrm flipV="1">
-            <a:off x="3279781" y="1409700"/>
-            <a:ext cx="0" cy="1113570"/>
-          </a:xfrm>
-          <a:prstGeom prst="line">
-            <a:avLst/>
-          </a:prstGeom>
-          <a:noFill/>
-          <a:ln w="22225">
-            <a:solidFill>
-              <a:srgbClr val="1F2937"/>
-            </a:solidFill>
-            <a:prstDash val="dash"/>
-          </a:ln>
-        </p:spPr>
-      </p:sp>
-      <p:sp>
-        <p:nvSpPr>
-          <p:cNvPr id="14" name="S03-mark46"/>
-          <p:cNvSpPr/>
-          <p:nvPr/>
-        </p:nvSpPr>
-        <p:spPr>
-          <a:xfrm>
-            <a:off x="2480608" y="2799807"/>
-            <a:ext cx="1187808" cy="0"/>
-          </a:xfrm>
-          <a:prstGeom prst="line">
-            <a:avLst/>
-          </a:prstGeom>
-          <a:noFill/>
-          <a:ln w="28575">
-            <a:solidFill>
-              <a:srgbClr val="1F2937"/>
-            </a:solidFill>
-            <a:prstDash val="solid"/>
-          </a:ln>
-        </p:spPr>
-      </p:sp>
-      <p:sp>
-        <p:nvSpPr>
-          <p:cNvPr id="15" name="S03-mark47"/>
-          <p:cNvSpPr/>
-          <p:nvPr/>
-        </p:nvSpPr>
-        <p:spPr>
-          <a:xfrm>
-            <a:off x="2480608" y="1686237"/>
-            <a:ext cx="1187808" cy="0"/>
-          </a:xfrm>
-          <a:prstGeom prst="line">
-            <a:avLst/>
-          </a:prstGeom>
-          <a:noFill/>
-          <a:ln w="28575">
-            <a:solidFill>
-              <a:srgbClr val="1F2937"/>
-            </a:solidFill>
-            <a:prstDash val="solid"/>
-          </a:ln>
-        </p:spPr>
-      </p:sp>
-      <p:sp>
-        <p:nvSpPr>
-          <p:cNvPr id="16" name="S03-mark48"/>
-          <p:cNvSpPr/>
-          <p:nvPr/>
-        </p:nvSpPr>
-        <p:spPr>
-          <a:xfrm flipH="1" flipV="1">
-            <a:off x="3279781" y="1409700"/>
-            <a:ext cx="388636" cy="276537"/>
-          </a:xfrm>
-          <a:prstGeom prst="line">
-            <a:avLst/>
-          </a:prstGeom>
-          <a:noFill/>
-          <a:ln w="28575">
-            <a:solidFill>
-              <a:srgbClr val="1F2937"/>
-            </a:solidFill>
-            <a:prstDash val="solid"/>
-          </a:ln>
-        </p:spPr>
-      </p:sp>
-      <p:sp>
-        <p:nvSpPr>
-          <p:cNvPr id="17" name="S03-mark49"/>
-          <p:cNvSpPr/>
-          <p:nvPr/>
-        </p:nvSpPr>
-        <p:spPr>
-          <a:xfrm flipV="1">
-            <a:off x="2480608" y="1409700"/>
-            <a:ext cx="799172" cy="276537"/>
-          </a:xfrm>
-          <a:prstGeom prst="line">
-            <a:avLst/>
-          </a:prstGeom>
-          <a:noFill/>
-          <a:ln w="28575">
-            <a:solidFill>
-              <a:srgbClr val="1F2937"/>
-            </a:solidFill>
-            <a:prstDash val="solid"/>
-          </a:ln>
-        </p:spPr>
-      </p:sp>
-      <p:sp>
-        <p:nvSpPr>
-          <p:cNvPr id="18" name="S03-mark50"/>
-          <p:cNvSpPr/>
-          <p:nvPr/>
-        </p:nvSpPr>
-        <p:spPr>
-          <a:xfrm flipV="1">
-            <a:off x="3668417" y="1686237"/>
-            <a:ext cx="0" cy="1113570"/>
-          </a:xfrm>
-          <a:prstGeom prst="line">
-            <a:avLst/>
-          </a:prstGeom>
-          <a:noFill/>
-          <a:ln w="28575">
-            <a:solidFill>
-              <a:srgbClr val="1F2937"/>
-            </a:solidFill>
-            <a:prstDash val="solid"/>
-          </a:ln>
-        </p:spPr>
-      </p:sp>
-      <p:sp>
-        <p:nvSpPr>
-          <p:cNvPr id="19" name="S03-mark51"/>
-          <p:cNvSpPr/>
-          <p:nvPr/>
-        </p:nvSpPr>
-        <p:spPr>
-          <a:xfrm flipV="1">
-            <a:off x="2480608" y="1686237"/>
-            <a:ext cx="0" cy="1113570"/>
-          </a:xfrm>
-          <a:prstGeom prst="line">
-            <a:avLst/>
-          </a:prstGeom>
-          <a:noFill/>
-          <a:ln w="28575">
-            <a:solidFill>
-              <a:srgbClr val="1F2937"/>
-            </a:solidFill>
-            <a:prstDash val="solid"/>
-          </a:ln>
-        </p:spPr>
-      </p:sp>
-      <p:sp>
-        <p:nvSpPr>
-          <p:cNvPr id="20" name="S03-label53"/>
-          <p:cNvSpPr txBox="1"/>
-          <p:nvPr/>
-        </p:nvSpPr>
-        <p:spPr>
-          <a:xfrm>
-            <a:off x="3673812" y="1381695"/>
-            <a:ext cx="657352" cy="349250"/>
-          </a:xfrm>
-          <a:prstGeom prst="rect">
-            <a:avLst/>
-          </a:prstGeom>
-          <a:noFill/>
-          <a:ln/>
-        </p:spPr>
-        <p:txBody>
-          <a:bodyPr wrap="square" lIns="0" tIns="0" rIns="0" bIns="0" rtlCol="0" anchor="ctr"/>
-          <a:lstStyle/>
-          <a:p>
-            <a:pPr eaLnBrk="0" algn="ctr" indent="0" marL="0">
-              <a:buNone/>
-            </a:pPr>
-            <a:r>
-              <a:rPr lang="ko-KR" altLang="en-US" sz="2200" b="1" dirty="0">
-                <a:solidFill>
-                  <a:srgbClr val="1F2937"/>
-                </a:solidFill>
-                <a:latin typeface="맑은 고딕" pitchFamily="34" charset="0"/>
-                <a:ea typeface="맑은 고딕" pitchFamily="34" charset="-122"/>
-                <a:cs typeface="맑은 고딕" pitchFamily="34" charset="-120"/>
-              </a:rPr>
-              <a:t>밑면</a:t>
-            </a:r>
-            <a:endParaRPr lang="ko-KR" sz="2200" dirty="0"/>
-          </a:p>
-        </p:txBody>
-      </p:sp>
-      <p:sp>
-        <p:nvSpPr>
-          <p:cNvPr id="21" name="S03-label55"/>
-          <p:cNvSpPr txBox="1"/>
-          <p:nvPr/>
-        </p:nvSpPr>
-        <p:spPr>
-          <a:xfrm>
-            <a:off x="3673812" y="2662301"/>
-            <a:ext cx="657352" cy="349250"/>
-          </a:xfrm>
-          <a:prstGeom prst="rect">
-            <a:avLst/>
-          </a:prstGeom>
-          <a:noFill/>
-          <a:ln/>
-        </p:spPr>
-        <p:txBody>
-          <a:bodyPr wrap="square" lIns="0" tIns="0" rIns="0" bIns="0" rtlCol="0" anchor="ctr"/>
-          <a:lstStyle/>
-          <a:p>
-            <a:pPr eaLnBrk="0" algn="ctr" indent="0" marL="0">
-              <a:buNone/>
-            </a:pPr>
-            <a:r>
-              <a:rPr lang="ko-KR" altLang="en-US" sz="2200" b="1" dirty="0">
-                <a:solidFill>
-                  <a:srgbClr val="1F2937"/>
-                </a:solidFill>
-                <a:latin typeface="맑은 고딕" pitchFamily="34" charset="0"/>
-                <a:ea typeface="맑은 고딕" pitchFamily="34" charset="-122"/>
-                <a:cs typeface="맑은 고딕" pitchFamily="34" charset="-120"/>
-              </a:rPr>
-              <a:t>밑면</a:t>
-            </a:r>
-            <a:endParaRPr lang="ko-KR" sz="2200" dirty="0"/>
-          </a:p>
-        </p:txBody>
-      </p:sp>
-      <p:sp>
-        <p:nvSpPr>
-          <p:cNvPr id="22" name="S03-label57"/>
-          <p:cNvSpPr txBox="1"/>
-          <p:nvPr/>
-        </p:nvSpPr>
-        <p:spPr>
-          <a:xfrm>
-            <a:off x="2727277" y="2068397"/>
-            <a:ext cx="657352" cy="349250"/>
-          </a:xfrm>
-          <a:prstGeom prst="rect">
-            <a:avLst/>
-          </a:prstGeom>
-          <a:noFill/>
-          <a:ln/>
-        </p:spPr>
-        <p:txBody>
-          <a:bodyPr wrap="square" lIns="0" tIns="0" rIns="0" bIns="0" rtlCol="0" anchor="ctr"/>
-          <a:lstStyle/>
-          <a:p>
-            <a:pPr eaLnBrk="0" algn="ctr" indent="0" marL="0">
-              <a:buNone/>
-            </a:pPr>
-            <a:r>
-              <a:rPr lang="ko-KR" altLang="en-US" sz="2200" b="1" dirty="0">
-                <a:solidFill>
-                  <a:srgbClr val="1F2937"/>
-                </a:solidFill>
-                <a:latin typeface="맑은 고딕" pitchFamily="34" charset="0"/>
-                <a:ea typeface="맑은 고딕" pitchFamily="34" charset="-122"/>
-                <a:cs typeface="맑은 고딕" pitchFamily="34" charset="-120"/>
-              </a:rPr>
-              <a:t>옆면</a:t>
-            </a:r>
-            <a:endParaRPr lang="ko-KR" sz="2200" dirty="0"/>
-          </a:p>
-        </p:txBody>
-      </p:sp>
-      <p:sp>
-        <p:nvSpPr>
-          <p:cNvPr id="23" name="S03-label58"/>
-          <p:cNvSpPr txBox="1"/>
-          <p:nvPr/>
-        </p:nvSpPr>
-        <p:spPr>
-          <a:xfrm>
-            <a:off x="548640" y="2993898"/>
-            <a:ext cx="5385816" cy="377190"/>
-          </a:xfrm>
-          <a:prstGeom prst="rect">
-            <a:avLst/>
-          </a:prstGeom>
-          <a:noFill/>
-          <a:ln/>
-        </p:spPr>
-        <p:txBody>
-          <a:bodyPr wrap="square" lIns="0" tIns="0" rIns="0" bIns="0" rtlCol="0" anchor="ctr"/>
-          <a:lstStyle/>
-          <a:p>
-            <a:pPr eaLnBrk="0" algn="ctr" indent="0" marL="0">
-              <a:buNone/>
-            </a:pPr>
-            <a:r>
-              <a:rPr lang="ko-KR" altLang="en-US" sz="2200" b="1" dirty="0">
-                <a:solidFill>
-                  <a:srgbClr val="1F2937"/>
-                </a:solidFill>
-                <a:latin typeface="맑은 고딕" pitchFamily="34" charset="0"/>
-                <a:ea typeface="맑은 고딕" pitchFamily="34" charset="-122"/>
-                <a:cs typeface="맑은 고딕" pitchFamily="34" charset="-120"/>
-              </a:rPr>
-              <a:t>삼각기둥</a:t>
-            </a:r>
-            <a:endParaRPr lang="ko-KR" sz="2200" dirty="0"/>
-          </a:p>
-        </p:txBody>
-      </p:sp>
-      <p:sp>
-        <p:nvSpPr>
-          <p:cNvPr id="24" name="S03-figure59" descr="오각기둥의 겨냥도: 위아래 밑면(오각형)을 색칠, 보이지 않는 모서리 5개는 점선"/>
-          <p:cNvSpPr/>
-          <p:nvPr/>
-        </p:nvSpPr>
-        <p:spPr>
-          <a:xfrm>
-            <a:off x="8366831" y="2485498"/>
-            <a:ext cx="1161145" cy="351428"/>
-          </a:xfrm>
-          <a:custGeom>
-            <a:avLst/>
-            <a:gdLst/>
-            <a:ahLst/>
-            <a:cxnLst/>
-            <a:rect l="l" t="t" r="r" b="b"/>
-            <a:pathLst>
-              <a:path w="1161145" h="351428">
-                <a:moveTo>
-                  <a:pt x="787126" y="0"/>
-                </a:moveTo>
-                <a:lnTo>
-                  <a:pt x="69927" y="134475"/>
-                </a:lnTo>
-                <a:lnTo>
-                  <a:pt x="0" y="351428"/>
-                </a:lnTo>
-                <a:lnTo>
-                  <a:pt x="674526" y="351428"/>
-                </a:lnTo>
-                <a:lnTo>
-                  <a:pt x="1161145" y="134475"/>
-                </a:lnTo>
-                <a:close/>
-              </a:path>
-            </a:pathLst>
-          </a:custGeom>
-          <a:solidFill>
-            <a:srgbClr val="F2C14E"/>
-          </a:solidFill>
-          <a:ln w="28575">
-            <a:solidFill>
-              <a:srgbClr val="1F2937"/>
-            </a:solidFill>
-            <a:prstDash val="dash"/>
-          </a:ln>
-        </p:spPr>
-      </p:sp>
-      <p:sp>
-        <p:nvSpPr>
-          <p:cNvPr id="25" name="S03-mark60"/>
-          <p:cNvSpPr/>
-          <p:nvPr/>
-        </p:nvSpPr>
-        <p:spPr>
-          <a:xfrm>
-            <a:off x="8366831" y="1409700"/>
-            <a:ext cx="1161145" cy="351428"/>
-          </a:xfrm>
-          <a:custGeom>
-            <a:avLst/>
-            <a:gdLst/>
-            <a:ahLst/>
-            <a:cxnLst/>
-            <a:rect l="l" t="t" r="r" b="b"/>
-            <a:pathLst>
-              <a:path w="1161145" h="351428">
-                <a:moveTo>
-                  <a:pt x="787126" y="0"/>
-                </a:moveTo>
-                <a:lnTo>
-                  <a:pt x="69927" y="134475"/>
-                </a:lnTo>
-                <a:lnTo>
-                  <a:pt x="0" y="351428"/>
-                </a:lnTo>
-                <a:lnTo>
-                  <a:pt x="674526" y="351428"/>
-                </a:lnTo>
-                <a:lnTo>
-                  <a:pt x="1161145" y="134475"/>
-                </a:lnTo>
-                <a:close/>
-              </a:path>
-            </a:pathLst>
-          </a:custGeom>
-          <a:solidFill>
-            <a:srgbClr val="F2C14E"/>
-          </a:solidFill>
-          <a:ln w="28575">
-            <a:solidFill>
-              <a:srgbClr val="1F2937"/>
-            </a:solidFill>
-            <a:prstDash val="solid"/>
-          </a:ln>
-        </p:spPr>
-      </p:sp>
-      <p:sp>
-        <p:nvSpPr>
-          <p:cNvPr id="26" name="S03-mark61"/>
-          <p:cNvSpPr/>
-          <p:nvPr/>
-        </p:nvSpPr>
-        <p:spPr>
-          <a:xfrm flipH="1">
-            <a:off x="8436758" y="2485498"/>
-            <a:ext cx="717199" cy="134475"/>
-          </a:xfrm>
-          <a:prstGeom prst="line">
-            <a:avLst/>
-          </a:prstGeom>
-          <a:noFill/>
-          <a:ln w="22225">
-            <a:solidFill>
-              <a:srgbClr val="1F2937"/>
-            </a:solidFill>
-            <a:prstDash val="dash"/>
-          </a:ln>
-        </p:spPr>
-      </p:sp>
-      <p:sp>
-        <p:nvSpPr>
-          <p:cNvPr id="27" name="S03-mark62"/>
-          <p:cNvSpPr/>
-          <p:nvPr/>
-        </p:nvSpPr>
-        <p:spPr>
-          <a:xfrm flipH="1">
-            <a:off x="8366831" y="2619973"/>
-            <a:ext cx="69927" cy="216953"/>
-          </a:xfrm>
-          <a:prstGeom prst="line">
-            <a:avLst/>
-          </a:prstGeom>
-          <a:noFill/>
-          <a:ln w="22225">
-            <a:solidFill>
-              <a:srgbClr val="1F2937"/>
-            </a:solidFill>
-            <a:prstDash val="dash"/>
-          </a:ln>
-        </p:spPr>
-      </p:sp>
-      <p:sp>
-        <p:nvSpPr>
-          <p:cNvPr id="28" name="S03-mark63"/>
-          <p:cNvSpPr/>
-          <p:nvPr/>
-        </p:nvSpPr>
-        <p:spPr>
-          <a:xfrm>
-            <a:off x="9153957" y="2485498"/>
-            <a:ext cx="374019" cy="134475"/>
-          </a:xfrm>
-          <a:prstGeom prst="line">
-            <a:avLst/>
-          </a:prstGeom>
-          <a:noFill/>
-          <a:ln w="22225">
-            <a:solidFill>
-              <a:srgbClr val="1F2937"/>
-            </a:solidFill>
-            <a:prstDash val="dash"/>
-          </a:ln>
-        </p:spPr>
-      </p:sp>
-      <p:sp>
-        <p:nvSpPr>
-          <p:cNvPr id="29" name="S03-mark64"/>
-          <p:cNvSpPr/>
-          <p:nvPr/>
-        </p:nvSpPr>
-        <p:spPr>
-          <a:xfrm flipV="1">
-            <a:off x="8436758" y="1544175"/>
-            <a:ext cx="0" cy="1075798"/>
-          </a:xfrm>
-          <a:prstGeom prst="line">
-            <a:avLst/>
-          </a:prstGeom>
-          <a:noFill/>
-          <a:ln w="22225">
-            <a:solidFill>
-              <a:srgbClr val="1F2937"/>
-            </a:solidFill>
-            <a:prstDash val="dash"/>
-          </a:ln>
-        </p:spPr>
-      </p:sp>
-      <p:sp>
-        <p:nvSpPr>
-          <p:cNvPr id="30" name="S03-mark65"/>
-          <p:cNvSpPr/>
-          <p:nvPr/>
-        </p:nvSpPr>
-        <p:spPr>
-          <a:xfrm flipV="1">
-            <a:off x="9153957" y="1409700"/>
-            <a:ext cx="0" cy="1075798"/>
-          </a:xfrm>
-          <a:prstGeom prst="line">
-            <a:avLst/>
-          </a:prstGeom>
-          <a:noFill/>
-          <a:ln w="22225">
-            <a:solidFill>
-              <a:srgbClr val="1F2937"/>
-            </a:solidFill>
-            <a:prstDash val="dash"/>
-          </a:ln>
-        </p:spPr>
-      </p:sp>
-      <p:sp>
-        <p:nvSpPr>
-          <p:cNvPr id="31" name="S03-mark66"/>
-          <p:cNvSpPr/>
-          <p:nvPr/>
-        </p:nvSpPr>
-        <p:spPr>
-          <a:xfrm>
-            <a:off x="8366831" y="2836926"/>
-            <a:ext cx="674526" cy="0"/>
-          </a:xfrm>
-          <a:prstGeom prst="line">
-            <a:avLst/>
-          </a:prstGeom>
-          <a:noFill/>
-          <a:ln w="28575">
-            <a:solidFill>
-              <a:srgbClr val="1F2937"/>
-            </a:solidFill>
-            <a:prstDash val="solid"/>
-          </a:ln>
-        </p:spPr>
-      </p:sp>
-      <p:sp>
-        <p:nvSpPr>
-          <p:cNvPr id="32" name="S03-mark67"/>
-          <p:cNvSpPr/>
-          <p:nvPr/>
-        </p:nvSpPr>
-        <p:spPr>
-          <a:xfrm flipV="1">
-            <a:off x="9041357" y="2619973"/>
-            <a:ext cx="486620" cy="216953"/>
-          </a:xfrm>
-          <a:prstGeom prst="line">
-            <a:avLst/>
-          </a:prstGeom>
-          <a:noFill/>
-          <a:ln w="28575">
-            <a:solidFill>
-              <a:srgbClr val="1F2937"/>
-            </a:solidFill>
-            <a:prstDash val="solid"/>
-          </a:ln>
-        </p:spPr>
-      </p:sp>
-      <p:sp>
-        <p:nvSpPr>
-          <p:cNvPr id="33" name="S03-mark68"/>
-          <p:cNvSpPr/>
-          <p:nvPr/>
-        </p:nvSpPr>
-        <p:spPr>
-          <a:xfrm flipH="1">
-            <a:off x="8436758" y="1409700"/>
-            <a:ext cx="717199" cy="134475"/>
-          </a:xfrm>
-          <a:prstGeom prst="line">
-            <a:avLst/>
-          </a:prstGeom>
-          <a:noFill/>
-          <a:ln w="28575">
-            <a:solidFill>
-              <a:srgbClr val="1F2937"/>
-            </a:solidFill>
-            <a:prstDash val="solid"/>
-          </a:ln>
-        </p:spPr>
-      </p:sp>
-      <p:sp>
-        <p:nvSpPr>
-          <p:cNvPr id="34" name="S03-mark69"/>
-          <p:cNvSpPr/>
-          <p:nvPr/>
-        </p:nvSpPr>
-        <p:spPr>
-          <a:xfrm flipH="1">
-            <a:off x="8366831" y="1544175"/>
-            <a:ext cx="69927" cy="216953"/>
-          </a:xfrm>
-          <a:prstGeom prst="line">
-            <a:avLst/>
-          </a:prstGeom>
-          <a:noFill/>
-          <a:ln w="28575">
-            <a:solidFill>
-              <a:srgbClr val="1F2937"/>
-            </a:solidFill>
-            <a:prstDash val="solid"/>
-          </a:ln>
-        </p:spPr>
-      </p:sp>
-      <p:sp>
-        <p:nvSpPr>
-          <p:cNvPr id="35" name="S03-mark70"/>
-          <p:cNvSpPr/>
-          <p:nvPr/>
-        </p:nvSpPr>
-        <p:spPr>
-          <a:xfrm>
-            <a:off x="8366831" y="1761128"/>
-            <a:ext cx="674526" cy="0"/>
-          </a:xfrm>
-          <a:prstGeom prst="line">
-            <a:avLst/>
-          </a:prstGeom>
-          <a:noFill/>
-          <a:ln w="28575">
-            <a:solidFill>
-              <a:srgbClr val="1F2937"/>
-            </a:solidFill>
-            <a:prstDash val="solid"/>
-          </a:ln>
-        </p:spPr>
-      </p:sp>
-      <p:sp>
-        <p:nvSpPr>
-          <p:cNvPr id="36" name="S03-mark71"/>
-          <p:cNvSpPr/>
-          <p:nvPr/>
-        </p:nvSpPr>
-        <p:spPr>
-          <a:xfrm flipV="1">
-            <a:off x="9041357" y="1544175"/>
-            <a:ext cx="486620" cy="216953"/>
-          </a:xfrm>
-          <a:prstGeom prst="line">
-            <a:avLst/>
-          </a:prstGeom>
-          <a:noFill/>
-          <a:ln w="28575">
-            <a:solidFill>
-              <a:srgbClr val="1F2937"/>
-            </a:solidFill>
-            <a:prstDash val="solid"/>
-          </a:ln>
-        </p:spPr>
-      </p:sp>
-      <p:sp>
-        <p:nvSpPr>
-          <p:cNvPr id="37" name="S03-mark72"/>
-          <p:cNvSpPr/>
-          <p:nvPr/>
-        </p:nvSpPr>
-        <p:spPr>
-          <a:xfrm>
-            <a:off x="9153957" y="1409700"/>
-            <a:ext cx="374019" cy="134475"/>
-          </a:xfrm>
-          <a:prstGeom prst="line">
-            <a:avLst/>
-          </a:prstGeom>
-          <a:noFill/>
-          <a:ln w="28575">
-            <a:solidFill>
-              <a:srgbClr val="1F2937"/>
-            </a:solidFill>
-            <a:prstDash val="solid"/>
-          </a:ln>
-        </p:spPr>
-      </p:sp>
-      <p:sp>
-        <p:nvSpPr>
-          <p:cNvPr id="38" name="S03-mark73"/>
-          <p:cNvSpPr/>
-          <p:nvPr/>
-        </p:nvSpPr>
-        <p:spPr>
-          <a:xfrm flipV="1">
-            <a:off x="8366831" y="1761128"/>
-            <a:ext cx="0" cy="1075798"/>
-          </a:xfrm>
-          <a:prstGeom prst="line">
-            <a:avLst/>
-          </a:prstGeom>
-          <a:noFill/>
-          <a:ln w="28575">
-            <a:solidFill>
-              <a:srgbClr val="1F2937"/>
-            </a:solidFill>
-            <a:prstDash val="solid"/>
-          </a:ln>
-        </p:spPr>
-      </p:sp>
-      <p:sp>
-        <p:nvSpPr>
-          <p:cNvPr id="39" name="S03-mark74"/>
-          <p:cNvSpPr/>
-          <p:nvPr/>
-        </p:nvSpPr>
-        <p:spPr>
-          <a:xfrm flipV="1">
-            <a:off x="9041357" y="1761128"/>
-            <a:ext cx="0" cy="1075798"/>
-          </a:xfrm>
-          <a:prstGeom prst="line">
-            <a:avLst/>
-          </a:prstGeom>
-          <a:noFill/>
-          <a:ln w="28575">
-            <a:solidFill>
-              <a:srgbClr val="1F2937"/>
-            </a:solidFill>
-            <a:prstDash val="solid"/>
-          </a:ln>
-        </p:spPr>
-      </p:sp>
-      <p:sp>
-        <p:nvSpPr>
-          <p:cNvPr id="40" name="S03-mark75"/>
-          <p:cNvSpPr/>
-          <p:nvPr/>
-        </p:nvSpPr>
-        <p:spPr>
-          <a:xfrm flipV="1">
-            <a:off x="9527977" y="1544175"/>
-            <a:ext cx="0" cy="1075798"/>
-          </a:xfrm>
-          <a:prstGeom prst="line">
-            <a:avLst/>
-          </a:prstGeom>
-          <a:noFill/>
-          <a:ln w="28575">
-            <a:solidFill>
-              <a:srgbClr val="1F2937"/>
-            </a:solidFill>
-            <a:prstDash val="solid"/>
-          </a:ln>
-        </p:spPr>
-      </p:sp>
-      <p:sp>
-        <p:nvSpPr>
-          <p:cNvPr id="41" name="S03-label76"/>
-          <p:cNvSpPr txBox="1"/>
-          <p:nvPr/>
-        </p:nvSpPr>
-        <p:spPr>
-          <a:xfrm>
-            <a:off x="6254496" y="2993898"/>
-            <a:ext cx="5385816" cy="377190"/>
-          </a:xfrm>
-          <a:prstGeom prst="rect">
-            <a:avLst/>
-          </a:prstGeom>
-          <a:noFill/>
-          <a:ln/>
-        </p:spPr>
-        <p:txBody>
-          <a:bodyPr wrap="square" lIns="0" tIns="0" rIns="0" bIns="0" rtlCol="0" anchor="ctr"/>
-          <a:lstStyle/>
-          <a:p>
-            <a:pPr eaLnBrk="0" algn="ctr" indent="0" marL="0">
-              <a:buNone/>
-            </a:pPr>
-            <a:r>
-              <a:rPr lang="ko-KR" altLang="en-US" sz="2200" b="1" dirty="0">
-                <a:solidFill>
-                  <a:srgbClr val="1F2937"/>
-                </a:solidFill>
-                <a:latin typeface="맑은 고딕" pitchFamily="34" charset="0"/>
-                <a:ea typeface="맑은 고딕" pitchFamily="34" charset="-122"/>
-                <a:cs typeface="맑은 고딕" pitchFamily="34" charset="-120"/>
-              </a:rPr>
-              <a:t>오각기둥</a:t>
-            </a:r>
-            <a:endParaRPr lang="ko-KR" sz="2200" dirty="0"/>
           </a:p>
         </p:txBody>
       </p:sp>
@@ -10917,14 +10396,14 @@
       </p:sp>
       <p:sp>
         <p:nvSpPr>
-          <p:cNvPr id="3" name="S04-figure77" descr="오각기둥: 꼭짓점 하나에 점, 모서리 하나를 굵게, 두 밑면 사이에 높이 화살표"/>
+          <p:cNvPr id="3" name="S04-figure58" descr="오각기둥: 꼭짓점 하나에 점, 모서리 하나를 굵게, 두 밑면 사이에 높이 화살표"/>
           <p:cNvSpPr/>
           <p:nvPr/>
         </p:nvSpPr>
         <p:spPr>
           <a:xfrm flipH="1">
-            <a:off x="2001594" y="4678607"/>
-            <a:ext cx="1795460" cy="336649"/>
+            <a:off x="1866473" y="4695444"/>
+            <a:ext cx="1828800" cy="342900"/>
           </a:xfrm>
           <a:prstGeom prst="line">
             <a:avLst/>
@@ -10940,14 +10419,14 @@
       </p:sp>
       <p:sp>
         <p:nvSpPr>
-          <p:cNvPr id="4" name="S04-mark78"/>
+          <p:cNvPr id="4" name="S04-mark59"/>
           <p:cNvSpPr/>
           <p:nvPr/>
         </p:nvSpPr>
         <p:spPr>
           <a:xfrm flipH="1">
-            <a:off x="1826537" y="5015256"/>
-            <a:ext cx="175057" cy="543127"/>
+            <a:off x="1688165" y="5038344"/>
+            <a:ext cx="178308" cy="553212"/>
           </a:xfrm>
           <a:prstGeom prst="line">
             <a:avLst/>
@@ -10963,14 +10442,14 @@
       </p:sp>
       <p:sp>
         <p:nvSpPr>
-          <p:cNvPr id="5" name="S04-mark79"/>
-          <p:cNvSpPr/>
-          <p:nvPr/>
-        </p:nvSpPr>
-        <p:spPr>
-          <a:xfrm>
-            <a:off x="3797054" y="4678607"/>
-            <a:ext cx="936332" cy="336649"/>
+          <p:cNvPr id="5" name="S04-mark60"/>
+          <p:cNvSpPr/>
+          <p:nvPr/>
+        </p:nvSpPr>
+        <p:spPr>
+          <a:xfrm>
+            <a:off x="3695273" y="4695444"/>
+            <a:ext cx="953719" cy="342900"/>
           </a:xfrm>
           <a:prstGeom prst="line">
             <a:avLst/>
@@ -10986,14 +10465,14 @@
       </p:sp>
       <p:sp>
         <p:nvSpPr>
-          <p:cNvPr id="6" name="S04-mark80"/>
+          <p:cNvPr id="6" name="S04-mark61"/>
           <p:cNvSpPr/>
           <p:nvPr/>
         </p:nvSpPr>
         <p:spPr>
           <a:xfrm flipV="1">
-            <a:off x="2001594" y="2322066"/>
-            <a:ext cx="0" cy="2693190"/>
+            <a:off x="1866473" y="2295144"/>
+            <a:ext cx="0" cy="2743200"/>
           </a:xfrm>
           <a:prstGeom prst="line">
             <a:avLst/>
@@ -11009,14 +10488,14 @@
       </p:sp>
       <p:sp>
         <p:nvSpPr>
-          <p:cNvPr id="7" name="S04-mark81"/>
+          <p:cNvPr id="7" name="S04-mark62"/>
           <p:cNvSpPr/>
           <p:nvPr/>
         </p:nvSpPr>
         <p:spPr>
           <a:xfrm flipV="1">
-            <a:off x="3797054" y="1985417"/>
-            <a:ext cx="0" cy="2693190"/>
+            <a:off x="3695273" y="1952244"/>
+            <a:ext cx="0" cy="2743200"/>
           </a:xfrm>
           <a:prstGeom prst="line">
             <a:avLst/>
@@ -11032,14 +10511,14 @@
       </p:sp>
       <p:sp>
         <p:nvSpPr>
-          <p:cNvPr id="8" name="S04-mark82"/>
-          <p:cNvSpPr/>
-          <p:nvPr/>
-        </p:nvSpPr>
-        <p:spPr>
-          <a:xfrm>
-            <a:off x="1826537" y="5558383"/>
-            <a:ext cx="1688630" cy="0"/>
+          <p:cNvPr id="8" name="S04-mark63"/>
+          <p:cNvSpPr/>
+          <p:nvPr/>
+        </p:nvSpPr>
+        <p:spPr>
+          <a:xfrm>
+            <a:off x="1688165" y="5591556"/>
+            <a:ext cx="1719986" cy="0"/>
           </a:xfrm>
           <a:prstGeom prst="line">
             <a:avLst/>
@@ -11055,14 +10534,14 @@
       </p:sp>
       <p:sp>
         <p:nvSpPr>
-          <p:cNvPr id="9" name="S04-mark83"/>
+          <p:cNvPr id="9" name="S04-mark64"/>
           <p:cNvSpPr/>
           <p:nvPr/>
         </p:nvSpPr>
         <p:spPr>
           <a:xfrm flipV="1">
-            <a:off x="3515167" y="5015256"/>
-            <a:ext cx="1218220" cy="543127"/>
+            <a:off x="3408152" y="5038344"/>
+            <a:ext cx="1240841" cy="553212"/>
           </a:xfrm>
           <a:prstGeom prst="line">
             <a:avLst/>
@@ -11078,14 +10557,14 @@
       </p:sp>
       <p:sp>
         <p:nvSpPr>
-          <p:cNvPr id="10" name="S04-mark84"/>
+          <p:cNvPr id="10" name="S04-mark65"/>
           <p:cNvSpPr/>
           <p:nvPr/>
         </p:nvSpPr>
         <p:spPr>
           <a:xfrm flipH="1">
-            <a:off x="2001594" y="1985417"/>
-            <a:ext cx="1795460" cy="336649"/>
+            <a:off x="1866473" y="1952244"/>
+            <a:ext cx="1828800" cy="342900"/>
           </a:xfrm>
           <a:prstGeom prst="line">
             <a:avLst/>
@@ -11101,14 +10580,14 @@
       </p:sp>
       <p:sp>
         <p:nvSpPr>
-          <p:cNvPr id="11" name="S04-mark85"/>
+          <p:cNvPr id="11" name="S04-mark66"/>
           <p:cNvSpPr/>
           <p:nvPr/>
         </p:nvSpPr>
         <p:spPr>
           <a:xfrm flipH="1">
-            <a:off x="1826537" y="2322066"/>
-            <a:ext cx="175057" cy="543127"/>
+            <a:off x="1688165" y="2295144"/>
+            <a:ext cx="178308" cy="553212"/>
           </a:xfrm>
           <a:prstGeom prst="line">
             <a:avLst/>
@@ -11124,14 +10603,14 @@
       </p:sp>
       <p:sp>
         <p:nvSpPr>
-          <p:cNvPr id="12" name="S04-mark86"/>
-          <p:cNvSpPr/>
-          <p:nvPr/>
-        </p:nvSpPr>
-        <p:spPr>
-          <a:xfrm>
-            <a:off x="1826537" y="2865193"/>
-            <a:ext cx="1688630" cy="0"/>
+          <p:cNvPr id="12" name="S04-mark67"/>
+          <p:cNvSpPr/>
+          <p:nvPr/>
+        </p:nvSpPr>
+        <p:spPr>
+          <a:xfrm>
+            <a:off x="1688165" y="2848356"/>
+            <a:ext cx="1719986" cy="0"/>
           </a:xfrm>
           <a:prstGeom prst="line">
             <a:avLst/>
@@ -11147,14 +10626,14 @@
       </p:sp>
       <p:sp>
         <p:nvSpPr>
-          <p:cNvPr id="13" name="S04-mark87"/>
+          <p:cNvPr id="13" name="S04-mark68"/>
           <p:cNvSpPr/>
           <p:nvPr/>
         </p:nvSpPr>
         <p:spPr>
           <a:xfrm flipV="1">
-            <a:off x="3515167" y="2322066"/>
-            <a:ext cx="1218220" cy="543127"/>
+            <a:off x="3408152" y="2295144"/>
+            <a:ext cx="1240841" cy="553212"/>
           </a:xfrm>
           <a:prstGeom prst="line">
             <a:avLst/>
@@ -11170,14 +10649,14 @@
       </p:sp>
       <p:sp>
         <p:nvSpPr>
-          <p:cNvPr id="14" name="S04-mark88"/>
-          <p:cNvSpPr/>
-          <p:nvPr/>
-        </p:nvSpPr>
-        <p:spPr>
-          <a:xfrm>
-            <a:off x="3797054" y="1985417"/>
-            <a:ext cx="936332" cy="336649"/>
+          <p:cNvPr id="14" name="S04-mark69"/>
+          <p:cNvSpPr/>
+          <p:nvPr/>
+        </p:nvSpPr>
+        <p:spPr>
+          <a:xfrm>
+            <a:off x="3695273" y="1952244"/>
+            <a:ext cx="953719" cy="342900"/>
           </a:xfrm>
           <a:prstGeom prst="line">
             <a:avLst/>
@@ -11193,14 +10672,14 @@
       </p:sp>
       <p:sp>
         <p:nvSpPr>
-          <p:cNvPr id="15" name="S04-mark89"/>
+          <p:cNvPr id="15" name="S04-mark70"/>
           <p:cNvSpPr/>
           <p:nvPr/>
         </p:nvSpPr>
         <p:spPr>
           <a:xfrm flipV="1">
-            <a:off x="1826537" y="2865193"/>
-            <a:ext cx="0" cy="2693190"/>
+            <a:off x="1688165" y="2848356"/>
+            <a:ext cx="0" cy="2743200"/>
           </a:xfrm>
           <a:prstGeom prst="line">
             <a:avLst/>
@@ -11216,14 +10695,14 @@
       </p:sp>
       <p:sp>
         <p:nvSpPr>
-          <p:cNvPr id="16" name="S04-mark90"/>
+          <p:cNvPr id="16" name="S04-mark71"/>
           <p:cNvSpPr/>
           <p:nvPr/>
         </p:nvSpPr>
         <p:spPr>
           <a:xfrm flipV="1">
-            <a:off x="3515167" y="2865193"/>
-            <a:ext cx="0" cy="2693190"/>
+            <a:off x="3408152" y="2848356"/>
+            <a:ext cx="0" cy="2743200"/>
           </a:xfrm>
           <a:prstGeom prst="line">
             <a:avLst/>
@@ -11239,14 +10718,14 @@
       </p:sp>
       <p:sp>
         <p:nvSpPr>
-          <p:cNvPr id="17" name="S04-mark91"/>
+          <p:cNvPr id="17" name="S04-mark72"/>
           <p:cNvSpPr/>
           <p:nvPr/>
         </p:nvSpPr>
         <p:spPr>
           <a:xfrm flipV="1">
-            <a:off x="4733387" y="2322066"/>
-            <a:ext cx="0" cy="2693190"/>
+            <a:off x="4648992" y="2295144"/>
+            <a:ext cx="0" cy="2743200"/>
           </a:xfrm>
           <a:prstGeom prst="line">
             <a:avLst/>
@@ -11262,14 +10741,14 @@
       </p:sp>
       <p:sp>
         <p:nvSpPr>
-          <p:cNvPr id="18" name="S04-mark92"/>
+          <p:cNvPr id="18" name="S04-mark73"/>
           <p:cNvSpPr/>
           <p:nvPr/>
         </p:nvSpPr>
         <p:spPr>
           <a:xfrm flipV="1">
-            <a:off x="1826537" y="2865193"/>
-            <a:ext cx="0" cy="2693190"/>
+            <a:off x="1688165" y="2848356"/>
+            <a:ext cx="0" cy="2743200"/>
           </a:xfrm>
           <a:prstGeom prst="line">
             <a:avLst/>
@@ -11285,14 +10764,14 @@
       </p:sp>
       <p:sp>
         <p:nvSpPr>
-          <p:cNvPr id="19" name="S04-mark93"/>
+          <p:cNvPr id="19" name="S04-mark74"/>
           <p:cNvSpPr/>
           <p:nvPr/>
         </p:nvSpPr>
         <p:spPr>
           <a:xfrm flipV="1">
-            <a:off x="5361798" y="2471987"/>
-            <a:ext cx="0" cy="2693190"/>
+            <a:off x="5289072" y="2447849"/>
+            <a:ext cx="0" cy="2743200"/>
           </a:xfrm>
           <a:prstGeom prst="line">
             <a:avLst/>
@@ -11310,13 +10789,13 @@
       </p:sp>
       <p:sp>
         <p:nvSpPr>
-          <p:cNvPr id="20" name="S04-label95"/>
+          <p:cNvPr id="20" name="S04-label76"/>
           <p:cNvSpPr txBox="1"/>
           <p:nvPr/>
         </p:nvSpPr>
         <p:spPr>
           <a:xfrm>
-            <a:off x="5390754" y="3643957"/>
+            <a:off x="5318028" y="3644824"/>
             <a:ext cx="657352" cy="349250"/>
           </a:xfrm>
           <a:prstGeom prst="rect">
@@ -11349,13 +10828,13 @@
       </p:sp>
       <p:sp>
         <p:nvSpPr>
-          <p:cNvPr id="21" name="S04-mark96"/>
-          <p:cNvSpPr/>
-          <p:nvPr/>
-        </p:nvSpPr>
-        <p:spPr>
-          <a:xfrm>
-            <a:off x="3455731" y="2805757"/>
+          <p:cNvPr id="21" name="S04-mark77"/>
+          <p:cNvSpPr/>
+          <p:nvPr/>
+        </p:nvSpPr>
+        <p:spPr>
+          <a:xfrm>
+            <a:off x="3348716" y="2788920"/>
             <a:ext cx="118872" cy="118872"/>
           </a:xfrm>
           <a:prstGeom prst="ellipse">
@@ -11374,13 +10853,13 @@
       </p:sp>
       <p:sp>
         <p:nvSpPr>
-          <p:cNvPr id="22" name="S04-label98"/>
+          <p:cNvPr id="22" name="S04-label79"/>
           <p:cNvSpPr txBox="1"/>
           <p:nvPr/>
         </p:nvSpPr>
         <p:spPr>
           <a:xfrm>
-            <a:off x="3229131" y="2196816"/>
+            <a:off x="2119610" y="3085211"/>
             <a:ext cx="931164" cy="349250"/>
           </a:xfrm>
           <a:prstGeom prst="rect">
@@ -11413,13 +10892,13 @@
       </p:sp>
       <p:sp>
         <p:nvSpPr>
-          <p:cNvPr id="23" name="S04-label100"/>
+          <p:cNvPr id="23" name="S04-label81"/>
           <p:cNvSpPr txBox="1"/>
           <p:nvPr/>
         </p:nvSpPr>
         <p:spPr>
           <a:xfrm>
-            <a:off x="418338" y="4037163"/>
+            <a:off x="491063" y="4045331"/>
             <a:ext cx="931164" cy="349250"/>
           </a:xfrm>
           <a:prstGeom prst="rect">
@@ -11452,7 +10931,7 @@
       </p:sp>
       <p:sp>
         <p:nvSpPr>
-          <p:cNvPr id="24" name="S04-card101"/>
+          <p:cNvPr id="24" name="S04-card82"/>
           <p:cNvSpPr/>
           <p:nvPr/>
         </p:nvSpPr>
@@ -11479,7 +10958,7 @@
       </p:sp>
       <p:sp>
         <p:nvSpPr>
-          <p:cNvPr id="25" name="S04-cardtext102"/>
+          <p:cNvPr id="25" name="S04-cardtext83"/>
           <p:cNvSpPr txBox="1"/>
           <p:nvPr/>
         </p:nvSpPr>
@@ -11541,7 +11020,7 @@
       </p:sp>
       <p:sp>
         <p:nvSpPr>
-          <p:cNvPr id="26" name="S04-card103"/>
+          <p:cNvPr id="26" name="S04-card84"/>
           <p:cNvSpPr/>
           <p:nvPr/>
         </p:nvSpPr>
@@ -11568,7 +11047,7 @@
       </p:sp>
       <p:sp>
         <p:nvSpPr>
-          <p:cNvPr id="27" name="S04-cardtext104"/>
+          <p:cNvPr id="27" name="S04-cardtext85"/>
           <p:cNvSpPr txBox="1"/>
           <p:nvPr/>
         </p:nvSpPr>
@@ -11650,7 +11129,7 @@
       </p:sp>
       <p:sp>
         <p:nvSpPr>
-          <p:cNvPr id="28" name="S04-card105"/>
+          <p:cNvPr id="28" name="S04-card86"/>
           <p:cNvSpPr/>
           <p:nvPr/>
         </p:nvSpPr>
@@ -11677,7 +11156,7 @@
       </p:sp>
       <p:sp>
         <p:nvSpPr>
-          <p:cNvPr id="29" name="S04-cardtext106"/>
+          <p:cNvPr id="29" name="S04-cardtext87"/>
           <p:cNvSpPr txBox="1"/>
           <p:nvPr/>
         </p:nvSpPr>
@@ -11853,7 +11332,7 @@
       </p:sp>
       <p:sp>
         <p:nvSpPr>
-          <p:cNvPr id="3" name="S05-text107"/>
+          <p:cNvPr id="3" name="S05-text88"/>
           <p:cNvSpPr txBox="1"/>
           <p:nvPr/>
         </p:nvSpPr>
@@ -11892,7 +11371,7 @@
       </p:sp>
       <p:sp>
         <p:nvSpPr>
-          <p:cNvPr id="4" name="S05-card108"/>
+          <p:cNvPr id="4" name="S05-card89"/>
           <p:cNvSpPr/>
           <p:nvPr/>
         </p:nvSpPr>
@@ -11919,7 +11398,7 @@
       </p:sp>
       <p:sp>
         <p:nvSpPr>
-          <p:cNvPr id="5" name="S05-cardtext109"/>
+          <p:cNvPr id="5" name="S05-cardtext90"/>
           <p:cNvSpPr txBox="1"/>
           <p:nvPr/>
         </p:nvSpPr>
@@ -11981,7 +11460,7 @@
       </p:sp>
       <p:graphicFrame>
         <p:nvGraphicFramePr>
-          <p:cNvPr id="6" name="S05-table110"/>
+          <p:cNvPr id="6" name="S05-table91"/>
           <p:cNvGraphicFramePr>
             <a:graphicFrameLocks noGrp="1"/>
           </p:cNvGraphicFramePr>
@@ -13827,7 +13306,7 @@
       </p:sp>
       <p:sp>
         <p:nvSpPr>
-          <p:cNvPr id="3" name="S06-card111"/>
+          <p:cNvPr id="3" name="S06-card92"/>
           <p:cNvSpPr/>
           <p:nvPr/>
         </p:nvSpPr>
@@ -13854,7 +13333,7 @@
       </p:sp>
       <p:sp>
         <p:nvSpPr>
-          <p:cNvPr id="4" name="S06-cardtext112"/>
+          <p:cNvPr id="4" name="S06-cardtext93"/>
           <p:cNvSpPr txBox="1"/>
           <p:nvPr/>
         </p:nvSpPr>
@@ -13896,7 +13375,7 @@
       </p:sp>
       <p:sp>
         <p:nvSpPr>
-          <p:cNvPr id="5" name="S06-chip113"/>
+          <p:cNvPr id="5" name="S06-chip94"/>
           <p:cNvSpPr txBox="1"/>
           <p:nvPr/>
         </p:nvSpPr>
@@ -13943,7 +13422,7 @@
       </p:sp>
       <p:sp>
         <p:nvSpPr>
-          <p:cNvPr id="6" name="S06-text114"/>
+          <p:cNvPr id="6" name="S06-text95"/>
           <p:cNvSpPr txBox="1"/>
           <p:nvPr/>
         </p:nvSpPr>
@@ -13999,7 +13478,7 @@
       </p:sp>
       <p:sp>
         <p:nvSpPr>
-          <p:cNvPr id="7" name="S06-chip115"/>
+          <p:cNvPr id="7" name="S06-chip96"/>
           <p:cNvSpPr txBox="1"/>
           <p:nvPr/>
         </p:nvSpPr>
@@ -14046,7 +13525,7 @@
       </p:sp>
       <p:sp>
         <p:nvSpPr>
-          <p:cNvPr id="8" name="S06-text116"/>
+          <p:cNvPr id="8" name="S06-text97"/>
           <p:cNvSpPr txBox="1"/>
           <p:nvPr/>
         </p:nvSpPr>
@@ -14102,7 +13581,7 @@
       </p:sp>
       <p:sp>
         <p:nvSpPr>
-          <p:cNvPr id="9" name="S06-chip117"/>
+          <p:cNvPr id="9" name="S06-chip98"/>
           <p:cNvSpPr txBox="1"/>
           <p:nvPr/>
         </p:nvSpPr>
@@ -14149,7 +13628,7 @@
       </p:sp>
       <p:sp>
         <p:nvSpPr>
-          <p:cNvPr id="10" name="S06-text118"/>
+          <p:cNvPr id="10" name="S06-text99"/>
           <p:cNvSpPr txBox="1"/>
           <p:nvPr/>
         </p:nvSpPr>
@@ -14205,7 +13684,7 @@
       </p:sp>
       <p:sp>
         <p:nvSpPr>
-          <p:cNvPr id="11" name="S06-chip119"/>
+          <p:cNvPr id="11" name="S06-chip100"/>
           <p:cNvSpPr txBox="1"/>
           <p:nvPr/>
         </p:nvSpPr>
@@ -14252,7 +13731,7 @@
       </p:sp>
       <p:sp>
         <p:nvSpPr>
-          <p:cNvPr id="12" name="S06-text120"/>
+          <p:cNvPr id="12" name="S06-text101"/>
           <p:cNvSpPr txBox="1"/>
           <p:nvPr/>
         </p:nvSpPr>
@@ -14422,7 +13901,7 @@
       </p:sp>
       <p:sp>
         <p:nvSpPr>
-          <p:cNvPr id="3" name="S07-card121"/>
+          <p:cNvPr id="3" name="S07-card102"/>
           <p:cNvSpPr/>
           <p:nvPr/>
         </p:nvSpPr>
@@ -14449,7 +13928,7 @@
       </p:sp>
       <p:sp>
         <p:nvSpPr>
-          <p:cNvPr id="4" name="S07-cardtext122"/>
+          <p:cNvPr id="4" name="S07-cardtext103"/>
           <p:cNvSpPr txBox="1"/>
           <p:nvPr/>
         </p:nvSpPr>
@@ -14483,7 +13962,7 @@
                 <a:ea typeface="맑은 고딕" pitchFamily="34" charset="-122"/>
                 <a:cs typeface="맑은 고딕" pitchFamily="34" charset="-120"/>
               </a:rPr>
-              <a:t>밑면의 모양에 따라 삼각뿔, 사각뿔, 오각뿔 …이라고 해요.</a:t>
+              <a:t>높이: 각뿔의 꼭짓점에서 밑면에 수직으로 그은 파란 점선의 길이</a:t>
             </a:r>
             <a:endParaRPr lang="ko-KR" sz="2800" dirty="0"/>
           </a:p>
@@ -14491,7 +13970,7 @@
       </p:sp>
       <p:sp>
         <p:nvSpPr>
-          <p:cNvPr id="5" name="S07-figure123" descr="사각뿔의 겨냥도: 밑면(사각형) 색칠, 앞 옆면(삼각형) 옅게 색칠, 꼭짓점에서 밑면까지 높이(점선)"/>
+          <p:cNvPr id="5" name="S07-figure104" descr="사각뿔의 겨냥도: 밑면(사각형) 색칠, 각뿔의 꼭짓점에 점, 꼭짓점에서 밑면까지 높이(파란 점선)"/>
           <p:cNvSpPr/>
           <p:nvPr/>
         </p:nvSpPr>
@@ -14537,50 +14016,30 @@
       </p:sp>
       <p:sp>
         <p:nvSpPr>
-          <p:cNvPr id="6" name="S07-mark124"/>
-          <p:cNvSpPr/>
-          <p:nvPr/>
-        </p:nvSpPr>
-        <p:spPr>
-          <a:xfrm>
-            <a:off x="1188355" y="1799247"/>
-            <a:ext cx="2250719" cy="2977874"/>
-          </a:xfrm>
-          <a:custGeom>
-            <a:avLst/>
-            <a:gdLst/>
-            <a:ahLst/>
-            <a:cxnLst/>
-            <a:rect l="l" t="t" r="r" b="b"/>
-            <a:pathLst>
-              <a:path w="2250719" h="2977874">
-                <a:moveTo>
-                  <a:pt x="0" y="2977874"/>
-                </a:moveTo>
-                <a:lnTo>
-                  <a:pt x="2250719" y="2977874"/>
-                </a:lnTo>
-                <a:lnTo>
-                  <a:pt x="1612727" y="0"/>
-                </a:lnTo>
-                <a:close/>
-              </a:path>
-            </a:pathLst>
-          </a:custGeom>
-          <a:solidFill>
-            <a:srgbClr val="FDEBDD"/>
-          </a:solidFill>
-          <a:ln w="28575">
-            <a:solidFill>
-              <a:srgbClr val="1F2937"/>
-            </a:solidFill>
-            <a:prstDash val="solid"/>
-          </a:ln>
-        </p:spPr>
-      </p:sp>
-      <p:sp>
-        <p:nvSpPr>
-          <p:cNvPr id="7" name="S07-mark125"/>
+          <p:cNvPr id="6" name="S07-mark105"/>
+          <p:cNvSpPr/>
+          <p:nvPr/>
+        </p:nvSpPr>
+        <p:spPr>
+          <a:xfrm>
+            <a:off x="2801082" y="1799247"/>
+            <a:ext cx="0" cy="2596983"/>
+          </a:xfrm>
+          <a:prstGeom prst="line">
+            <a:avLst/>
+          </a:prstGeom>
+          <a:noFill/>
+          <a:ln w="31750">
+            <a:solidFill>
+              <a:srgbClr val="3D5A80"/>
+            </a:solidFill>
+            <a:prstDash val="dash"/>
+          </a:ln>
+        </p:spPr>
+      </p:sp>
+      <p:sp>
+        <p:nvSpPr>
+          <p:cNvPr id="7" name="S07-mark106"/>
           <p:cNvSpPr/>
           <p:nvPr/>
         </p:nvSpPr>
@@ -14603,7 +14062,7 @@
       </p:sp>
       <p:sp>
         <p:nvSpPr>
-          <p:cNvPr id="8" name="S07-mark126"/>
+          <p:cNvPr id="8" name="S07-mark107"/>
           <p:cNvSpPr/>
           <p:nvPr/>
         </p:nvSpPr>
@@ -14626,7 +14085,7 @@
       </p:sp>
       <p:sp>
         <p:nvSpPr>
-          <p:cNvPr id="9" name="S07-mark127"/>
+          <p:cNvPr id="9" name="S07-mark108"/>
           <p:cNvSpPr/>
           <p:nvPr/>
         </p:nvSpPr>
@@ -14649,7 +14108,7 @@
       </p:sp>
       <p:sp>
         <p:nvSpPr>
-          <p:cNvPr id="10" name="S07-mark128"/>
+          <p:cNvPr id="10" name="S07-mark109"/>
           <p:cNvSpPr/>
           <p:nvPr/>
         </p:nvSpPr>
@@ -14672,7 +14131,7 @@
       </p:sp>
       <p:sp>
         <p:nvSpPr>
-          <p:cNvPr id="11" name="S07-mark129"/>
+          <p:cNvPr id="11" name="S07-mark110"/>
           <p:cNvSpPr/>
           <p:nvPr/>
         </p:nvSpPr>
@@ -14695,7 +14154,7 @@
       </p:sp>
       <p:sp>
         <p:nvSpPr>
-          <p:cNvPr id="12" name="S07-mark130"/>
+          <p:cNvPr id="12" name="S07-mark111"/>
           <p:cNvSpPr/>
           <p:nvPr/>
         </p:nvSpPr>
@@ -14718,7 +14177,7 @@
       </p:sp>
       <p:sp>
         <p:nvSpPr>
-          <p:cNvPr id="13" name="S07-mark131"/>
+          <p:cNvPr id="13" name="S07-mark112"/>
           <p:cNvSpPr/>
           <p:nvPr/>
         </p:nvSpPr>
@@ -14741,7 +14200,7 @@
       </p:sp>
       <p:sp>
         <p:nvSpPr>
-          <p:cNvPr id="14" name="S07-mark132"/>
+          <p:cNvPr id="14" name="S07-mark113"/>
           <p:cNvSpPr/>
           <p:nvPr/>
         </p:nvSpPr>
@@ -14764,30 +14223,7 @@
       </p:sp>
       <p:sp>
         <p:nvSpPr>
-          <p:cNvPr id="15" name="S07-mark133"/>
-          <p:cNvSpPr/>
-          <p:nvPr/>
-        </p:nvSpPr>
-        <p:spPr>
-          <a:xfrm>
-            <a:off x="2801082" y="1799247"/>
-            <a:ext cx="0" cy="2596983"/>
-          </a:xfrm>
-          <a:prstGeom prst="line">
-            <a:avLst/>
-          </a:prstGeom>
-          <a:noFill/>
-          <a:ln w="31750">
-            <a:solidFill>
-              <a:srgbClr val="3D5A80"/>
-            </a:solidFill>
-            <a:prstDash val="dash"/>
-          </a:ln>
-        </p:spPr>
-      </p:sp>
-      <p:sp>
-        <p:nvSpPr>
-          <p:cNvPr id="16" name="S07-mark134"/>
+          <p:cNvPr id="15" name="S07-mark114"/>
           <p:cNvSpPr/>
           <p:nvPr/>
         </p:nvSpPr>
@@ -14812,7 +14248,7 @@
       </p:sp>
       <p:sp>
         <p:nvSpPr>
-          <p:cNvPr id="17" name="S07-label136"/>
+          <p:cNvPr id="16" name="S07-label116"/>
           <p:cNvSpPr txBox="1"/>
           <p:nvPr/>
         </p:nvSpPr>
@@ -14851,46 +14287,7 @@
       </p:sp>
       <p:sp>
         <p:nvSpPr>
-          <p:cNvPr id="18" name="S07-label138"/>
-          <p:cNvSpPr txBox="1"/>
-          <p:nvPr/>
-        </p:nvSpPr>
-        <p:spPr>
-          <a:xfrm>
-            <a:off x="3009115" y="3442511"/>
-            <a:ext cx="657352" cy="349250"/>
-          </a:xfrm>
-          <a:prstGeom prst="rect">
-            <a:avLst/>
-          </a:prstGeom>
-          <a:noFill/>
-          <a:ln/>
-        </p:spPr>
-        <p:txBody>
-          <a:bodyPr wrap="square" lIns="0" tIns="0" rIns="0" bIns="0" rtlCol="0" anchor="ctr"/>
-          <a:lstStyle/>
-          <a:p>
-            <a:pPr eaLnBrk="0" algn="ctr" indent="0" marL="0">
-              <a:buNone/>
-            </a:pPr>
-            <a:r>
-              <a:rPr lang="ko-KR" altLang="en-US" sz="2200" b="1" dirty="0">
-                <a:solidFill>
-                  <a:srgbClr val="1F2937"/>
-                </a:solidFill>
-                <a:latin typeface="맑은 고딕" pitchFamily="34" charset="0"/>
-                <a:ea typeface="맑은 고딕" pitchFamily="34" charset="-122"/>
-                <a:cs typeface="맑은 고딕" pitchFamily="34" charset="-120"/>
-              </a:rPr>
-              <a:t>높이</a:t>
-            </a:r>
-            <a:endParaRPr lang="ko-KR" sz="2200" dirty="0"/>
-          </a:p>
-        </p:txBody>
-      </p:sp>
-      <p:sp>
-        <p:nvSpPr>
-          <p:cNvPr id="19" name="S07-label140"/>
+          <p:cNvPr id="17" name="S07-label118"/>
           <p:cNvSpPr txBox="1"/>
           <p:nvPr/>
         </p:nvSpPr>
@@ -14929,13 +14326,13 @@
       </p:sp>
       <p:sp>
         <p:nvSpPr>
-          <p:cNvPr id="20" name="S07-label142"/>
+          <p:cNvPr id="18" name="S07-label120"/>
           <p:cNvSpPr txBox="1"/>
           <p:nvPr/>
         </p:nvSpPr>
         <p:spPr>
           <a:xfrm>
-            <a:off x="2147783" y="3739433"/>
+            <a:off x="3309500" y="3442511"/>
             <a:ext cx="657352" cy="349250"/>
           </a:xfrm>
           <a:prstGeom prst="rect">
@@ -14968,7 +14365,7 @@
       </p:sp>
       <p:sp>
         <p:nvSpPr>
-          <p:cNvPr id="21" name="S07-card143"/>
+          <p:cNvPr id="19" name="S07-card121"/>
           <p:cNvSpPr/>
           <p:nvPr/>
         </p:nvSpPr>
@@ -14995,7 +14392,7 @@
       </p:sp>
       <p:sp>
         <p:nvSpPr>
-          <p:cNvPr id="22" name="S07-cardtext144"/>
+          <p:cNvPr id="20" name="S07-cardtext122"/>
           <p:cNvSpPr txBox="1"/>
           <p:nvPr/>
         </p:nvSpPr>
@@ -15037,7 +14434,7 @@
       </p:sp>
       <p:sp>
         <p:nvSpPr>
-          <p:cNvPr id="23" name="S07-card145"/>
+          <p:cNvPr id="21" name="S07-card123"/>
           <p:cNvSpPr/>
           <p:nvPr/>
         </p:nvSpPr>
@@ -15064,7 +14461,7 @@
       </p:sp>
       <p:sp>
         <p:nvSpPr>
-          <p:cNvPr id="24" name="S07-cardtext146"/>
+          <p:cNvPr id="22" name="S07-cardtext124"/>
           <p:cNvSpPr txBox="1"/>
           <p:nvPr/>
         </p:nvSpPr>
@@ -15106,7 +14503,7 @@
       </p:sp>
       <p:sp>
         <p:nvSpPr>
-          <p:cNvPr id="25" name="S07-card147"/>
+          <p:cNvPr id="23" name="S07-card125"/>
           <p:cNvSpPr/>
           <p:nvPr/>
         </p:nvSpPr>
@@ -15133,7 +14530,7 @@
       </p:sp>
       <p:sp>
         <p:nvSpPr>
-          <p:cNvPr id="26" name="S07-cardtext148"/>
+          <p:cNvPr id="24" name="S07-cardtext126"/>
           <p:cNvSpPr txBox="1"/>
           <p:nvPr/>
         </p:nvSpPr>
@@ -15309,7 +14706,7 @@
       </p:sp>
       <p:sp>
         <p:nvSpPr>
-          <p:cNvPr id="3" name="S08-text149"/>
+          <p:cNvPr id="3" name="S08-text127"/>
           <p:cNvSpPr txBox="1"/>
           <p:nvPr/>
         </p:nvSpPr>
@@ -15340,7 +14737,7 @@
                 <a:ea typeface="맑은 고딕" pitchFamily="34" charset="-122"/>
                 <a:cs typeface="맑은 고딕" pitchFamily="34" charset="-120"/>
               </a:rPr>
-              <a:t>규칙을 찾아 빈칸을 채워요.</a:t>
+              <a:t>밑면의 모양에 따라 삼각뿔, 사각뿔 …이에요.</a:t>
             </a:r>
             <a:endParaRPr lang="ko-KR" sz="2800" dirty="0"/>
           </a:p>
@@ -15348,7 +14745,7 @@
       </p:sp>
       <p:sp>
         <p:nvSpPr>
-          <p:cNvPr id="4" name="S08-card150"/>
+          <p:cNvPr id="4" name="S08-card128"/>
           <p:cNvSpPr/>
           <p:nvPr/>
         </p:nvSpPr>
@@ -15375,7 +14772,7 @@
       </p:sp>
       <p:sp>
         <p:nvSpPr>
-          <p:cNvPr id="5" name="S08-cardtext151"/>
+          <p:cNvPr id="5" name="S08-cardtext129"/>
           <p:cNvSpPr txBox="1"/>
           <p:nvPr/>
         </p:nvSpPr>
@@ -15409,7 +14806,7 @@
                 <a:ea typeface="맑은 고딕" pitchFamily="34" charset="-122"/>
                 <a:cs typeface="맑은 고딕" pitchFamily="34" charset="-120"/>
               </a:rPr>
-              <a:t>각기둥의 규칙과 무엇이 다른지 말해요.</a:t>
+              <a:t>규칙을 찾아 빈칸을 채우고, 각기둥과 무엇이 다른지 말해요.</a:t>
             </a:r>
             <a:endParaRPr lang="ko-KR" sz="2800" dirty="0"/>
           </a:p>
@@ -15417,7 +14814,7 @@
       </p:sp>
       <p:graphicFrame>
         <p:nvGraphicFramePr>
-          <p:cNvPr id="9" name="S08-table152"/>
+          <p:cNvPr id="9" name="S08-table130"/>
           <p:cNvGraphicFramePr>
             <a:graphicFrameLocks noGrp="1"/>
           </p:cNvGraphicFramePr>
@@ -17263,14 +16660,14 @@
       </p:sp>
       <p:sp>
         <p:nvSpPr>
-          <p:cNvPr id="3" name="S09-figure153" descr="눕혀 놓은 삼각기둥: 앞 삼각형 면 가(색칠), 오른쪽 위 직사각형 면 나, 바닥에 닿은 직사각형 면 다"/>
-          <p:cNvSpPr/>
-          <p:nvPr/>
-        </p:nvSpPr>
-        <p:spPr>
-          <a:xfrm>
-            <a:off x="6893662" y="3330702"/>
-            <a:ext cx="2743200" cy="1463040"/>
+          <p:cNvPr id="3" name="S09-figure131" descr="눕혀 놓은 삼각기둥: 앞 삼각형 면 가(색칠), 오른쪽 위 직사각형 면 나, 바닥에 닿은 직사각형 면 다"/>
+          <p:cNvSpPr/>
+          <p:nvPr/>
+        </p:nvSpPr>
+        <p:spPr>
+          <a:xfrm>
+            <a:off x="6893662" y="3239262"/>
+            <a:ext cx="2743200" cy="1645920"/>
           </a:xfrm>
           <a:custGeom>
             <a:avLst/>
@@ -17279,15 +16676,15 @@
             <a:cxnLst/>
             <a:rect l="l" t="t" r="r" b="b"/>
             <a:pathLst>
-              <a:path w="2743200" h="1463040">
+              <a:path w="2743200" h="1645920">
                 <a:moveTo>
-                  <a:pt x="0" y="1463040"/>
+                  <a:pt x="0" y="1645920"/>
                 </a:moveTo>
                 <a:lnTo>
-                  <a:pt x="2743200" y="1463040"/>
+                  <a:pt x="2743200" y="1645920"/>
                 </a:lnTo>
                 <a:lnTo>
-                  <a:pt x="2194560" y="0"/>
+                  <a:pt x="1371600" y="0"/>
                 </a:lnTo>
                 <a:close/>
               </a:path>
@@ -17306,13 +16703,13 @@
       </p:sp>
       <p:sp>
         <p:nvSpPr>
-          <p:cNvPr id="4" name="S09-mark154"/>
-          <p:cNvSpPr/>
-          <p:nvPr/>
-        </p:nvSpPr>
-        <p:spPr>
-          <a:xfrm>
-            <a:off x="8280806" y="3710178"/>
+          <p:cNvPr id="4" name="S09-mark132"/>
+          <p:cNvSpPr/>
+          <p:nvPr/>
+        </p:nvSpPr>
+        <p:spPr>
+          <a:xfrm>
+            <a:off x="8280806" y="3801618"/>
             <a:ext cx="2743200" cy="0"/>
           </a:xfrm>
           <a:prstGeom prst="line">
@@ -17329,13 +16726,59 @@
       </p:sp>
       <p:sp>
         <p:nvSpPr>
-          <p:cNvPr id="5" name="S09-mark155"/>
-          <p:cNvSpPr/>
-          <p:nvPr/>
-        </p:nvSpPr>
-        <p:spPr>
-          <a:xfrm>
-            <a:off x="6893662" y="4793742"/>
+          <p:cNvPr id="5" name="S09-mark133"/>
+          <p:cNvSpPr/>
+          <p:nvPr/>
+        </p:nvSpPr>
+        <p:spPr>
+          <a:xfrm flipV="1">
+            <a:off x="8280806" y="2155698"/>
+            <a:ext cx="1371600" cy="1645920"/>
+          </a:xfrm>
+          <a:prstGeom prst="line">
+            <a:avLst/>
+          </a:prstGeom>
+          <a:noFill/>
+          <a:ln w="22225">
+            <a:solidFill>
+              <a:srgbClr val="1F2937"/>
+            </a:solidFill>
+            <a:prstDash val="dash"/>
+          </a:ln>
+        </p:spPr>
+      </p:sp>
+      <p:sp>
+        <p:nvSpPr>
+          <p:cNvPr id="6" name="S09-mark134"/>
+          <p:cNvSpPr/>
+          <p:nvPr/>
+        </p:nvSpPr>
+        <p:spPr>
+          <a:xfrm flipV="1">
+            <a:off x="6893662" y="3801618"/>
+            <a:ext cx="1387145" cy="1083564"/>
+          </a:xfrm>
+          <a:prstGeom prst="line">
+            <a:avLst/>
+          </a:prstGeom>
+          <a:noFill/>
+          <a:ln w="22225">
+            <a:solidFill>
+              <a:srgbClr val="1F2937"/>
+            </a:solidFill>
+            <a:prstDash val="dash"/>
+          </a:ln>
+        </p:spPr>
+      </p:sp>
+      <p:sp>
+        <p:nvSpPr>
+          <p:cNvPr id="7" name="S09-mark135"/>
+          <p:cNvSpPr/>
+          <p:nvPr/>
+        </p:nvSpPr>
+        <p:spPr>
+          <a:xfrm>
+            <a:off x="6893662" y="4885182"/>
             <a:ext cx="2743200" cy="0"/>
           </a:xfrm>
           <a:prstGeom prst="line">
@@ -17352,14 +16795,14 @@
       </p:sp>
       <p:sp>
         <p:nvSpPr>
-          <p:cNvPr id="6" name="S09-mark156"/>
+          <p:cNvPr id="8" name="S09-mark136"/>
           <p:cNvSpPr/>
           <p:nvPr/>
         </p:nvSpPr>
         <p:spPr>
           <a:xfrm flipH="1" flipV="1">
-            <a:off x="9088222" y="3330702"/>
-            <a:ext cx="548640" cy="1463040"/>
+            <a:off x="8265262" y="3239262"/>
+            <a:ext cx="1371600" cy="1645920"/>
           </a:xfrm>
           <a:prstGeom prst="line">
             <a:avLst/>
@@ -17375,14 +16818,14 @@
       </p:sp>
       <p:sp>
         <p:nvSpPr>
-          <p:cNvPr id="7" name="S09-mark157"/>
+          <p:cNvPr id="9" name="S09-mark137"/>
           <p:cNvSpPr/>
           <p:nvPr/>
         </p:nvSpPr>
         <p:spPr>
           <a:xfrm flipV="1">
-            <a:off x="6893662" y="3330702"/>
-            <a:ext cx="2194560" cy="1463040"/>
+            <a:off x="6893662" y="3239262"/>
+            <a:ext cx="1371600" cy="1645920"/>
           </a:xfrm>
           <a:prstGeom prst="line">
             <a:avLst/>
@@ -17398,14 +16841,14 @@
       </p:sp>
       <p:sp>
         <p:nvSpPr>
-          <p:cNvPr id="8" name="S09-mark158"/>
+          <p:cNvPr id="10" name="S09-mark138"/>
           <p:cNvSpPr/>
           <p:nvPr/>
         </p:nvSpPr>
         <p:spPr>
           <a:xfrm flipH="1" flipV="1">
-            <a:off x="10475366" y="2247138"/>
-            <a:ext cx="548640" cy="1463040"/>
+            <a:off x="9652406" y="2155698"/>
+            <a:ext cx="1371600" cy="1645920"/>
           </a:xfrm>
           <a:prstGeom prst="line">
             <a:avLst/>
@@ -17421,14 +16864,14 @@
       </p:sp>
       <p:sp>
         <p:nvSpPr>
-          <p:cNvPr id="9" name="S09-mark159"/>
+          <p:cNvPr id="11" name="S09-mark139"/>
           <p:cNvSpPr/>
           <p:nvPr/>
         </p:nvSpPr>
         <p:spPr>
           <a:xfrm flipV="1">
-            <a:off x="8280806" y="2247138"/>
-            <a:ext cx="2194560" cy="1463040"/>
+            <a:off x="9636862" y="3801618"/>
+            <a:ext cx="1387145" cy="1083564"/>
           </a:xfrm>
           <a:prstGeom prst="line">
             <a:avLst/>
@@ -17444,13 +16887,13 @@
       </p:sp>
       <p:sp>
         <p:nvSpPr>
-          <p:cNvPr id="10" name="S09-mark160"/>
+          <p:cNvPr id="12" name="S09-mark140"/>
           <p:cNvSpPr/>
           <p:nvPr/>
         </p:nvSpPr>
         <p:spPr>
           <a:xfrm flipV="1">
-            <a:off x="9636862" y="3710178"/>
+            <a:off x="8265262" y="2155698"/>
             <a:ext cx="1387145" cy="1083564"/>
           </a:xfrm>
           <a:prstGeom prst="line">
@@ -17467,59 +16910,13 @@
       </p:sp>
       <p:sp>
         <p:nvSpPr>
-          <p:cNvPr id="11" name="S09-mark161"/>
-          <p:cNvSpPr/>
-          <p:nvPr/>
-        </p:nvSpPr>
-        <p:spPr>
-          <a:xfrm flipV="1">
-            <a:off x="6893662" y="3710178"/>
-            <a:ext cx="1387145" cy="1083564"/>
-          </a:xfrm>
-          <a:prstGeom prst="line">
-            <a:avLst/>
-          </a:prstGeom>
-          <a:noFill/>
-          <a:ln w="28575">
-            <a:solidFill>
-              <a:srgbClr val="1F2937"/>
-            </a:solidFill>
-            <a:prstDash val="solid"/>
-          </a:ln>
-        </p:spPr>
-      </p:sp>
-      <p:sp>
-        <p:nvSpPr>
-          <p:cNvPr id="12" name="S09-mark162"/>
-          <p:cNvSpPr/>
-          <p:nvPr/>
-        </p:nvSpPr>
-        <p:spPr>
-          <a:xfrm flipV="1">
-            <a:off x="9088222" y="2247138"/>
-            <a:ext cx="1387145" cy="1083564"/>
-          </a:xfrm>
-          <a:prstGeom prst="line">
-            <a:avLst/>
-          </a:prstGeom>
-          <a:noFill/>
-          <a:ln w="28575">
-            <a:solidFill>
-              <a:srgbClr val="1F2937"/>
-            </a:solidFill>
-            <a:prstDash val="solid"/>
-          </a:ln>
-        </p:spPr>
-      </p:sp>
-      <p:sp>
-        <p:nvSpPr>
-          <p:cNvPr id="13" name="S09-label164"/>
+          <p:cNvPr id="13" name="S09-label142"/>
           <p:cNvSpPr txBox="1"/>
           <p:nvPr/>
         </p:nvSpPr>
         <p:spPr>
           <a:xfrm>
-            <a:off x="8347812" y="4131742"/>
+            <a:off x="8073492" y="4161917"/>
             <a:ext cx="383540" cy="349250"/>
           </a:xfrm>
           <a:prstGeom prst="rect">
@@ -17552,13 +16949,13 @@
       </p:sp>
       <p:sp>
         <p:nvSpPr>
-          <p:cNvPr id="14" name="S09-label166"/>
+          <p:cNvPr id="14" name="S09-label144"/>
           <p:cNvSpPr txBox="1"/>
           <p:nvPr/>
         </p:nvSpPr>
         <p:spPr>
           <a:xfrm>
-            <a:off x="9863887" y="3345358"/>
+            <a:off x="9636201" y="2934792"/>
             <a:ext cx="383540" cy="349250"/>
           </a:xfrm>
           <a:prstGeom prst="rect">
@@ -17591,13 +16988,13 @@
       </p:sp>
       <p:sp>
         <p:nvSpPr>
-          <p:cNvPr id="15" name="S09-label168"/>
+          <p:cNvPr id="15" name="S09-label146"/>
           <p:cNvSpPr txBox="1"/>
           <p:nvPr/>
         </p:nvSpPr>
         <p:spPr>
           <a:xfrm>
-            <a:off x="7997800" y="5122037"/>
+            <a:off x="8272120" y="5213477"/>
             <a:ext cx="1266444" cy="349250"/>
           </a:xfrm>
           <a:prstGeom prst="rect">
@@ -17630,7 +17027,7 @@
       </p:sp>
       <p:sp>
         <p:nvSpPr>
-          <p:cNvPr id="16" name="S09-chip169"/>
+          <p:cNvPr id="16" name="S09-chip147"/>
           <p:cNvSpPr txBox="1"/>
           <p:nvPr/>
         </p:nvSpPr>
@@ -17677,7 +17074,7 @@
       </p:sp>
       <p:sp>
         <p:nvSpPr>
-          <p:cNvPr id="17" name="S09-text170"/>
+          <p:cNvPr id="17" name="S09-text148"/>
           <p:cNvSpPr txBox="1"/>
           <p:nvPr/>
         </p:nvSpPr>
@@ -17733,7 +17130,7 @@
       </p:sp>
       <p:sp>
         <p:nvSpPr>
-          <p:cNvPr id="18" name="S09-chip171"/>
+          <p:cNvPr id="18" name="S09-chip149"/>
           <p:cNvSpPr txBox="1"/>
           <p:nvPr/>
         </p:nvSpPr>
@@ -17780,7 +17177,7 @@
       </p:sp>
       <p:sp>
         <p:nvSpPr>
-          <p:cNvPr id="19" name="S09-text172"/>
+          <p:cNvPr id="19" name="S09-text150"/>
           <p:cNvSpPr txBox="1"/>
           <p:nvPr/>
         </p:nvSpPr>
@@ -17836,7 +17233,7 @@
       </p:sp>
       <p:sp>
         <p:nvSpPr>
-          <p:cNvPr id="20" name="S09-chip173"/>
+          <p:cNvPr id="20" name="S09-chip151"/>
           <p:cNvSpPr txBox="1"/>
           <p:nvPr/>
         </p:nvSpPr>
@@ -17883,7 +17280,7 @@
       </p:sp>
       <p:sp>
         <p:nvSpPr>
-          <p:cNvPr id="21" name="S09-text174"/>
+          <p:cNvPr id="21" name="S09-text152"/>
           <p:cNvSpPr txBox="1"/>
           <p:nvPr/>
         </p:nvSpPr>
